--- a/slides/pptx/week13.pptx
+++ b/slides/pptx/week13.pptx
@@ -18,9 +18,10 @@
     <p:sldId id="266" r:id="rId12"/>
     <p:sldId id="267" r:id="rId13"/>
     <p:sldId id="268" r:id="rId14"/>
+    <p:sldId id="269" r:id="rId15"/>
   </p:sldIdLst>
   <p:notesMasterIdLst>
-    <p:notesMasterId r:id="rId15"/>
+    <p:notesMasterId r:id="rId16"/>
   </p:notesMasterIdLst>
   <p:sldSz cx="9144000" cy="5143500"/>
   <p:notesSz cx="5143500" cy="9144000"/>
@@ -602,7 +603,7 @@
           <a:p>
             <a:r>
               <a:rPr lang="en-US" dirty="0"/>
-              <a:t>Explain before lab. Find AND fix = the flag (defending is the point). Q6 of the quiz asks for one misconfig they fixed + the principle it violated. ~3 min.</a:t>
+              <a:t>Awareness only (K8s is its own course). Key takeaways: a privileged pod ≈ host root; mounted service-account tokens are a lateral-movement prize. Keep it brief. ~3 min.</a:t>
             </a:r>
             <a:endParaRPr lang="en-US" dirty="0"/>
           </a:p>
@@ -690,7 +691,7 @@
           <a:p>
             <a:r>
               <a:rPr lang="en-US" dirty="0"/>
-              <a:t>Before/after artifacts + the trivy delta prove the fix. AI-resilient tasks count.</a:t>
+              <a:t>Explain before lab: 9 flags total, two categories only — no separate bucket/storage flag, no IaC/localstack target exists in this lab. Find AND explain (why it's a finding, which fix applies) = the flag. Q6 of the quiz asks for one misconfig they explained + the principle it violated. ~3 min.</a:t>
             </a:r>
             <a:endParaRPr lang="en-US" dirty="0"/>
           </a:p>
@@ -778,7 +779,7 @@
           <a:p>
             <a:r>
               <a:rPr lang="en-US" dirty="0"/>
-              <a:t>Recap. Cold-call: "what does a `*:*` IAM policy cost you if the key leaks?" (everything — full blast radius). "Scan in CI" sets up W15. ~2 min.</a:t>
+              <a:t>Before/after artifacts + the trivy delta prove the container-side fix; IAM has no scanner delta to show, it's reasoned/written. Don't let "trivy over Dockerfiles + IAM JSON" stand — that's the exact misconception this lab's own history already fixed once. AI-resilient tasks count.</a:t>
             </a:r>
             <a:endParaRPr lang="en-US" dirty="0"/>
           </a:p>
@@ -866,7 +867,7 @@
           <a:p>
             <a:r>
               <a:rPr lang="en-US" dirty="0"/>
-              <a:t>Cliffhanger: "Next week — the newest attack surface: make an AI assistant ignore its rules and leak secrets, with nothing but text."</a:t>
+              <a:t>Recap. Cold-call: "what does a `*:*` IAM policy cost you if the key leaks?" (everything — full blast radius). "Scan in CI" sets up W15. ~2 min.</a:t>
             </a:r>
             <a:endParaRPr lang="en-US" dirty="0"/>
           </a:p>
@@ -890,6 +891,94 @@
             <a:fld id="{F7021451-1387-4CA6-816F-3879F97B5CBC}" type="slidenum">
               <a:rPr lang="en-US"/>
               <a:t>13</a:t>
+            </a:fld>
+            <a:endParaRPr lang="en-US"/>
+          </a:p>
+        </p:txBody>
+      </p:sp>
+    </p:spTree>
+    <p:extLst>
+      <p:ext uri="{BB962C8B-B14F-4D97-AF65-F5344CB8AC3E}">
+        <p14:creationId xmlns:p14="http://schemas.microsoft.com/office/powerpoint/2010/main" val="1024086991"/>
+      </p:ext>
+    </p:extLst>
+  </p:cSld>
+  <p:clrMapOvr>
+    <a:masterClrMapping/>
+  </p:clrMapOvr>
+</p:notes>
+</file>
+
+<file path=ppt/notesSlides/notesSlide14.xml><?xml version="1.0" encoding="utf-8"?>
+<p:notes xmlns:a="http://schemas.openxmlformats.org/drawingml/2006/main" xmlns:r="http://schemas.openxmlformats.org/officeDocument/2006/relationships" xmlns:p="http://schemas.openxmlformats.org/presentationml/2006/main">
+  <p:cSld>
+    <p:spTree>
+      <p:nvGrpSpPr>
+        <p:cNvPr id="1" name=""/>
+        <p:cNvGrpSpPr/>
+        <p:nvPr/>
+      </p:nvGrpSpPr>
+      <p:grpSpPr>
+        <a:xfrm>
+          <a:off x="0" y="0"/>
+          <a:ext cx="0" cy="0"/>
+          <a:chOff x="0" y="0"/>
+          <a:chExt cx="0" cy="0"/>
+        </a:xfrm>
+      </p:grpSpPr>
+      <p:sp>
+        <p:nvSpPr>
+          <p:cNvPr id="2" name="Slide Image Placeholder 1"/>
+          <p:cNvSpPr>
+            <a:spLocks noGrp="1" noRot="1" noChangeAspect="1"/>
+          </p:cNvSpPr>
+          <p:nvPr>
+            <p:ph type="sldImg"/>
+          </p:nvPr>
+        </p:nvSpPr>
+        <p:spPr/>
+      </p:sp>
+      <p:sp>
+        <p:nvSpPr>
+          <p:cNvPr id="3" name="Notes Placeholder 2"/>
+          <p:cNvSpPr>
+            <a:spLocks noGrp="1"/>
+          </p:cNvSpPr>
+          <p:nvPr>
+            <p:ph type="body" idx="1"/>
+          </p:nvPr>
+        </p:nvSpPr>
+        <p:spPr/>
+        <p:txBody>
+          <a:bodyPr/>
+          <a:lstStyle/>
+          <a:p>
+            <a:r>
+              <a:rPr lang="en-US" dirty="0"/>
+              <a:t>Cliffhanger: "Next week — the newest attack surface: make an AI assistant ignore its rules and leak secrets, with nothing but text."</a:t>
+            </a:r>
+            <a:endParaRPr lang="en-US" dirty="0"/>
+          </a:p>
+        </p:txBody>
+      </p:sp>
+      <p:sp>
+        <p:nvSpPr>
+          <p:cNvPr id="4" name="Slide Number Placeholder 3"/>
+          <p:cNvSpPr>
+            <a:spLocks noGrp="1"/>
+          </p:cNvSpPr>
+          <p:nvPr>
+            <p:ph type="sldNum" sz="quarter" idx="10"/>
+          </p:nvPr>
+        </p:nvSpPr>
+        <p:spPr/>
+        <p:txBody>
+          <a:bodyPr/>
+          <a:lstStyle/>
+          <a:p>
+            <a:fld id="{F7021451-1387-4CA6-816F-3879F97B5CBC}" type="slidenum">
+              <a:rPr lang="en-US"/>
+              <a:t>14</a:t>
             </a:fld>
             <a:endParaRPr lang="en-US"/>
           </a:p>
@@ -1218,7 +1307,7 @@
           <a:p>
             <a:r>
               <a:rPr lang="en-US" dirty="0"/>
-              <a:t>The worked example — this `*:*` policy is the Misconfig Hunt round 1 and the quiz. If a credential with this leaks, the attacker owns everything. Ask the class to rewrite it as read-only on one bucket. Least privilege = smallest possible blast radius. ~6 min.</a:t>
+              <a:t>The worked example — this `*:*` policy is the Misconfig Hunt round 1 and the quiz. If a credential with this leaks, the attacker owns everything. This is 100% manual review — Trivy's config scanner does not parse standalone IAM JSON at all, say so explicitly so students don't wait for a scanner to flag it. Ask the class to rewrite it as read-only on one bucket, with a Condition. Least privilege = smallest possible blast radius. ~6 min.</a:t>
             </a:r>
             <a:endParaRPr lang="en-US" dirty="0"/>
           </a:p>
@@ -1482,7 +1571,7 @@
           <a:p>
             <a:r>
               <a:rPr lang="en-US" dirty="0"/>
-              <a:t>Hands-on — this is the lab's insecure→hardened Dockerfile. `trivy config` finds the misconfig (root user, latest tag); `trivy image` finds CVEs in the base. Drop root + distroless = container escape gives far less. Re-scan to prove improvement. ~5 min.</a:t>
+              <a:t>Hands-on — this is the lab's insecure→hardened Dockerfile, always run dockerized (never a bare local trivy binary), against week13-hardened:lab (not a generic myapp:lab). The Trivy-blind-spot point is the actual lesson of this lab, not an aside — half the graded findings need a human, not a tool. Re-scan to prove improvement. ~5 min.</a:t>
             </a:r>
             <a:endParaRPr lang="en-US" dirty="0"/>
           </a:p>
@@ -1570,7 +1659,7 @@
           <a:p>
             <a:r>
               <a:rPr lang="en-US" dirty="0"/>
-              <a:t>Awareness only (K8s is its own course). Key takeaways: a privileged pod ≈ host root; mounted service-account tokens are a lateral-movement prize. Keep it brief. ~3 min.</a:t>
+              <a:t>Hands-on — this is the lab's insecure→hardened Dockerfile, always run dockerized (never a bare local trivy binary), against week13-hardened:lab (not a generic myapp:lab). The Trivy-blind-spot point is the actual lesson of this lab, not an aside — half the graded findings need a human, not a tool. Re-scan to prove improvement. ~5 min.</a:t>
             </a:r>
             <a:endParaRPr lang="en-US" dirty="0"/>
           </a:p>
@@ -2203,7 +2292,7 @@
                 <a:ea typeface="Arial" pitchFamily="34" charset="-122"/>
                 <a:cs typeface="Arial" pitchFamily="34" charset="-120"/>
               </a:rPr>
-              <a:t>🔍 Game — Misconfig Hunt (CloudGoat-style)</a:t>
+              <a:t>Kubernetes basics (awareness)</a:t>
             </a:r>
             <a:endParaRPr lang="en-US" sz="2600" dirty="0"/>
           </a:p>
@@ -2211,14 +2300,43 @@
       </p:sp>
       <p:sp>
         <p:nvSpPr>
-          <p:cNvPr id="5" name="Text 2"/>
-          <p:cNvSpPr/>
-          <p:nvPr/>
-        </p:nvSpPr>
-        <p:spPr>
-          <a:xfrm>
-            <a:off x="548640" y="1325880"/>
-            <a:ext cx="8046720" cy="548640"/>
+          <p:cNvPr id="5" name="Shape 2"/>
+          <p:cNvSpPr/>
+          <p:nvPr/>
+        </p:nvSpPr>
+        <p:spPr>
+          <a:xfrm>
+            <a:off x="457200" y="1325880"/>
+            <a:ext cx="8229600" cy="896112"/>
+          </a:xfrm>
+          <a:prstGeom prst="roundRect">
+            <a:avLst>
+              <a:gd name="adj" fmla="val 8163"/>
+            </a:avLst>
+          </a:prstGeom>
+          <a:solidFill>
+            <a:srgbClr val="F1F5F9"/>
+          </a:solidFill>
+          <a:ln/>
+          <a:effectLst>
+            <a:outerShdw sx="100000" sy="100000" kx="0" ky="0" algn="bl" rotWithShape="0" blurRad="76200" dist="25400" dir="5400000">
+              <a:srgbClr val="000000">
+                <a:alpha val="12000"/>
+              </a:srgbClr>
+            </a:outerShdw>
+          </a:effectLst>
+        </p:spPr>
+      </p:sp>
+      <p:sp>
+        <p:nvSpPr>
+          <p:cNvPr id="6" name="Text 3"/>
+          <p:cNvSpPr/>
+          <p:nvPr/>
+        </p:nvSpPr>
+        <p:spPr>
+          <a:xfrm>
+            <a:off x="731520" y="1435608"/>
+            <a:ext cx="7680960" cy="676656"/>
           </a:xfrm>
           <a:prstGeom prst="rect">
             <a:avLst/>
@@ -2227,11 +2345,17 @@
           <a:ln/>
         </p:spPr>
         <p:txBody>
-          <a:bodyPr wrap="square" lIns="0" tIns="0" rIns="0" bIns="0" rtlCol="0" anchor="t"/>
-          <a:lstStyle/>
-          <a:p>
-            <a:pPr indent="0" marL="0">
-              <a:buNone/>
+          <a:bodyPr wrap="square" lIns="0" tIns="0" rIns="0" bIns="0" rtlCol="0" anchor="t">
+            <a:normAutofit/>
+          </a:bodyPr>
+          <a:lstStyle/>
+          <a:p>
+            <a:pPr marL="342900" indent="-342900">
+              <a:spcAft>
+                <a:spcPts val="600"/>
+              </a:spcAft>
+              <a:buSzPct val="100000"/>
+              <a:buChar char="•"/>
             </a:pPr>
             <a:r>
               <a:rPr lang="en-US" sz="1400" dirty="0">
@@ -2242,97 +2366,20 @@
                 <a:ea typeface="Calibri" pitchFamily="34" charset="-122"/>
                 <a:cs typeface="Calibri" pitchFamily="34" charset="-120"/>
               </a:rPr>
-              <a:t>Each misconfiguration found + fixed = a flag:</a:t>
+              <a:t>Pod security, network policies, RBAC</a:t>
             </a:r>
             <a:endParaRPr lang="en-US" sz="1400" dirty="0"/>
           </a:p>
-        </p:txBody>
-      </p:sp>
-      <p:sp>
-        <p:nvSpPr>
-          <p:cNvPr id="6" name="Shape 3"/>
-          <p:cNvSpPr/>
-          <p:nvPr/>
-        </p:nvSpPr>
-        <p:spPr>
-          <a:xfrm>
-            <a:off x="502920" y="1965960"/>
-            <a:ext cx="384048" cy="384048"/>
-          </a:xfrm>
-          <a:prstGeom prst="ellipse">
-            <a:avLst/>
-          </a:prstGeom>
-          <a:solidFill>
-            <a:srgbClr val="E35205"/>
-          </a:solidFill>
-          <a:ln/>
-        </p:spPr>
-      </p:sp>
-      <p:sp>
-        <p:nvSpPr>
-          <p:cNvPr id="7" name="Text 4"/>
-          <p:cNvSpPr/>
-          <p:nvPr/>
-        </p:nvSpPr>
-        <p:spPr>
-          <a:xfrm>
-            <a:off x="502920" y="1965960"/>
-            <a:ext cx="384048" cy="384048"/>
-          </a:xfrm>
-          <a:prstGeom prst="rect">
-            <a:avLst/>
-          </a:prstGeom>
-          <a:noFill/>
-          <a:ln/>
-        </p:spPr>
-        <p:txBody>
-          <a:bodyPr wrap="square" lIns="0" tIns="0" rIns="0" bIns="0" rtlCol="0" anchor="ctr"/>
-          <a:lstStyle/>
-          <a:p>
-            <a:pPr algn="ctr" indent="0" marL="0">
-              <a:buNone/>
-            </a:pPr>
-            <a:r>
-              <a:rPr lang="en-US" sz="1500" b="1" dirty="0">
-                <a:solidFill>
-                  <a:srgbClr val="0E1726"/>
-                </a:solidFill>
-                <a:latin typeface="Arial" pitchFamily="34" charset="0"/>
-                <a:ea typeface="Arial" pitchFamily="34" charset="-122"/>
-                <a:cs typeface="Arial" pitchFamily="34" charset="-120"/>
-              </a:rPr>
-              <a:t>1</a:t>
-            </a:r>
-            <a:endParaRPr lang="en-US" sz="1500" dirty="0"/>
-          </a:p>
-        </p:txBody>
-      </p:sp>
-      <p:sp>
-        <p:nvSpPr>
-          <p:cNvPr id="8" name="Text 5"/>
-          <p:cNvSpPr/>
-          <p:nvPr/>
-        </p:nvSpPr>
-        <p:spPr>
-          <a:xfrm>
-            <a:off x="1051560" y="1965960"/>
-            <a:ext cx="7589520" cy="384048"/>
-          </a:xfrm>
-          <a:prstGeom prst="rect">
-            <a:avLst/>
-          </a:prstGeom>
-          <a:noFill/>
-          <a:ln/>
-        </p:spPr>
-        <p:txBody>
-          <a:bodyPr wrap="square" lIns="0" tIns="0" rIns="0" bIns="0" rtlCol="0" anchor="ctr"/>
-          <a:lstStyle/>
-          <a:p>
-            <a:pPr indent="0" marL="0">
-              <a:buNone/>
-            </a:pPr>
-            <a:r>
-              <a:rPr lang="en-US" sz="1350" dirty="0">
+          <a:p>
+            <a:pPr marL="342900" indent="-342900">
+              <a:spcAft>
+                <a:spcPts val="600"/>
+              </a:spcAft>
+              <a:buSzPct val="100000"/>
+              <a:buChar char="•"/>
+            </a:pPr>
+            <a:r>
+              <a:rPr lang="en-US" sz="1400" dirty="0">
                 <a:solidFill>
                   <a:srgbClr val="1F2937"/>
                 </a:solidFill>
@@ -2340,81 +2387,22 @@
                 <a:ea typeface="Calibri" pitchFamily="34" charset="-122"/>
                 <a:cs typeface="Calibri" pitchFamily="34" charset="-120"/>
               </a:rPr>
-              <a:t>Over-permissive IAM (:) → least privilege</a:t>
-            </a:r>
-            <a:endParaRPr lang="en-US" sz="1350" dirty="0"/>
-          </a:p>
-        </p:txBody>
-      </p:sp>
-      <p:sp>
-        <p:nvSpPr>
-          <p:cNvPr id="9" name="Shape 6"/>
-          <p:cNvSpPr/>
-          <p:nvPr/>
-        </p:nvSpPr>
-        <p:spPr>
-          <a:xfrm>
-            <a:off x="502920" y="2423160"/>
-            <a:ext cx="384048" cy="384048"/>
-          </a:xfrm>
-          <a:prstGeom prst="ellipse">
-            <a:avLst/>
-          </a:prstGeom>
-          <a:solidFill>
-            <a:srgbClr val="E35205"/>
-          </a:solidFill>
-          <a:ln/>
-        </p:spPr>
-      </p:sp>
-      <p:sp>
-        <p:nvSpPr>
-          <p:cNvPr id="10" name="Text 7"/>
-          <p:cNvSpPr/>
-          <p:nvPr/>
-        </p:nvSpPr>
-        <p:spPr>
-          <a:xfrm>
-            <a:off x="502920" y="2423160"/>
-            <a:ext cx="384048" cy="384048"/>
-          </a:xfrm>
-          <a:prstGeom prst="rect">
-            <a:avLst/>
-          </a:prstGeom>
-          <a:noFill/>
-          <a:ln/>
-        </p:spPr>
-        <p:txBody>
-          <a:bodyPr wrap="square" lIns="0" tIns="0" rIns="0" bIns="0" rtlCol="0" anchor="ctr"/>
-          <a:lstStyle/>
-          <a:p>
-            <a:pPr algn="ctr" indent="0" marL="0">
-              <a:buNone/>
-            </a:pPr>
-            <a:r>
-              <a:rPr lang="en-US" sz="1500" b="1" dirty="0">
-                <a:solidFill>
-                  <a:srgbClr val="0E1726"/>
-                </a:solidFill>
-                <a:latin typeface="Arial" pitchFamily="34" charset="0"/>
-                <a:ea typeface="Arial" pitchFamily="34" charset="-122"/>
-                <a:cs typeface="Arial" pitchFamily="34" charset="-120"/>
-              </a:rPr>
-              <a:t>2</a:t>
-            </a:r>
-            <a:endParaRPr lang="en-US" sz="1500" dirty="0"/>
-          </a:p>
-        </p:txBody>
-      </p:sp>
-      <p:sp>
-        <p:nvSpPr>
-          <p:cNvPr id="11" name="Text 8"/>
-          <p:cNvSpPr/>
-          <p:nvPr/>
-        </p:nvSpPr>
-        <p:spPr>
-          <a:xfrm>
-            <a:off x="1051560" y="2423160"/>
-            <a:ext cx="7589520" cy="384048"/>
+              <a:t>Don't run privileged; limit service-account tokens</a:t>
+            </a:r>
+            <a:endParaRPr lang="en-US" sz="1400" dirty="0"/>
+          </a:p>
+        </p:txBody>
+      </p:sp>
+      <p:sp>
+        <p:nvSpPr>
+          <p:cNvPr id="7" name="Text 4"/>
+          <p:cNvSpPr/>
+          <p:nvPr/>
+        </p:nvSpPr>
+        <p:spPr>
+          <a:xfrm>
+            <a:off x="457200" y="4800600"/>
+            <a:ext cx="6949440" cy="274320"/>
           </a:xfrm>
           <a:prstGeom prst="rect">
             <a:avLst/>
@@ -2430,249 +2418,14 @@
               <a:buNone/>
             </a:pPr>
             <a:r>
-              <a:rPr lang="en-US" sz="1350" dirty="0">
-                <a:solidFill>
-                  <a:srgbClr val="1F2937"/>
+              <a:rPr lang="en-US" sz="900" dirty="0">
+                <a:solidFill>
+                  <a:srgbClr val="64748B"/>
                 </a:solidFill>
                 <a:latin typeface="Calibri" pitchFamily="34" charset="0"/>
                 <a:ea typeface="Calibri" pitchFamily="34" charset="-122"/>
                 <a:cs typeface="Calibri" pitchFamily="34" charset="-120"/>
               </a:rPr>
-              <a:t>Exposed bucket → lock down</a:t>
-            </a:r>
-            <a:endParaRPr lang="en-US" sz="1350" dirty="0"/>
-          </a:p>
-        </p:txBody>
-      </p:sp>
-      <p:sp>
-        <p:nvSpPr>
-          <p:cNvPr id="12" name="Shape 9"/>
-          <p:cNvSpPr/>
-          <p:nvPr/>
-        </p:nvSpPr>
-        <p:spPr>
-          <a:xfrm>
-            <a:off x="502920" y="2880360"/>
-            <a:ext cx="384048" cy="384048"/>
-          </a:xfrm>
-          <a:prstGeom prst="ellipse">
-            <a:avLst/>
-          </a:prstGeom>
-          <a:solidFill>
-            <a:srgbClr val="E35205"/>
-          </a:solidFill>
-          <a:ln/>
-        </p:spPr>
-      </p:sp>
-      <p:sp>
-        <p:nvSpPr>
-          <p:cNvPr id="13" name="Text 10"/>
-          <p:cNvSpPr/>
-          <p:nvPr/>
-        </p:nvSpPr>
-        <p:spPr>
-          <a:xfrm>
-            <a:off x="502920" y="2880360"/>
-            <a:ext cx="384048" cy="384048"/>
-          </a:xfrm>
-          <a:prstGeom prst="rect">
-            <a:avLst/>
-          </a:prstGeom>
-          <a:noFill/>
-          <a:ln/>
-        </p:spPr>
-        <p:txBody>
-          <a:bodyPr wrap="square" lIns="0" tIns="0" rIns="0" bIns="0" rtlCol="0" anchor="ctr"/>
-          <a:lstStyle/>
-          <a:p>
-            <a:pPr algn="ctr" indent="0" marL="0">
-              <a:buNone/>
-            </a:pPr>
-            <a:r>
-              <a:rPr lang="en-US" sz="1500" b="1" dirty="0">
-                <a:solidFill>
-                  <a:srgbClr val="0E1726"/>
-                </a:solidFill>
-                <a:latin typeface="Arial" pitchFamily="34" charset="0"/>
-                <a:ea typeface="Arial" pitchFamily="34" charset="-122"/>
-                <a:cs typeface="Arial" pitchFamily="34" charset="-120"/>
-              </a:rPr>
-              <a:t>3</a:t>
-            </a:r>
-            <a:endParaRPr lang="en-US" sz="1500" dirty="0"/>
-          </a:p>
-        </p:txBody>
-      </p:sp>
-      <p:sp>
-        <p:nvSpPr>
-          <p:cNvPr id="14" name="Text 11"/>
-          <p:cNvSpPr/>
-          <p:nvPr/>
-        </p:nvSpPr>
-        <p:spPr>
-          <a:xfrm>
-            <a:off x="1051560" y="2880360"/>
-            <a:ext cx="7589520" cy="384048"/>
-          </a:xfrm>
-          <a:prstGeom prst="rect">
-            <a:avLst/>
-          </a:prstGeom>
-          <a:noFill/>
-          <a:ln/>
-        </p:spPr>
-        <p:txBody>
-          <a:bodyPr wrap="square" lIns="0" tIns="0" rIns="0" bIns="0" rtlCol="0" anchor="ctr"/>
-          <a:lstStyle/>
-          <a:p>
-            <a:pPr indent="0" marL="0">
-              <a:buNone/>
-            </a:pPr>
-            <a:r>
-              <a:rPr lang="en-US" sz="1350" dirty="0">
-                <a:solidFill>
-                  <a:srgbClr val="1F2937"/>
-                </a:solidFill>
-                <a:latin typeface="Calibri" pitchFamily="34" charset="0"/>
-                <a:ea typeface="Calibri" pitchFamily="34" charset="-122"/>
-                <a:cs typeface="Calibri" pitchFamily="34" charset="-120"/>
-              </a:rPr>
-              <a:t>Env-var secrets → secrets manager</a:t>
-            </a:r>
-            <a:endParaRPr lang="en-US" sz="1350" dirty="0"/>
-          </a:p>
-        </p:txBody>
-      </p:sp>
-      <p:sp>
-        <p:nvSpPr>
-          <p:cNvPr id="15" name="Shape 12"/>
-          <p:cNvSpPr/>
-          <p:nvPr/>
-        </p:nvSpPr>
-        <p:spPr>
-          <a:xfrm>
-            <a:off x="502920" y="3337560"/>
-            <a:ext cx="384048" cy="384048"/>
-          </a:xfrm>
-          <a:prstGeom prst="ellipse">
-            <a:avLst/>
-          </a:prstGeom>
-          <a:solidFill>
-            <a:srgbClr val="E35205"/>
-          </a:solidFill>
-          <a:ln/>
-        </p:spPr>
-      </p:sp>
-      <p:sp>
-        <p:nvSpPr>
-          <p:cNvPr id="16" name="Text 13"/>
-          <p:cNvSpPr/>
-          <p:nvPr/>
-        </p:nvSpPr>
-        <p:spPr>
-          <a:xfrm>
-            <a:off x="502920" y="3337560"/>
-            <a:ext cx="384048" cy="384048"/>
-          </a:xfrm>
-          <a:prstGeom prst="rect">
-            <a:avLst/>
-          </a:prstGeom>
-          <a:noFill/>
-          <a:ln/>
-        </p:spPr>
-        <p:txBody>
-          <a:bodyPr wrap="square" lIns="0" tIns="0" rIns="0" bIns="0" rtlCol="0" anchor="ctr"/>
-          <a:lstStyle/>
-          <a:p>
-            <a:pPr algn="ctr" indent="0" marL="0">
-              <a:buNone/>
-            </a:pPr>
-            <a:r>
-              <a:rPr lang="en-US" sz="1500" b="1" dirty="0">
-                <a:solidFill>
-                  <a:srgbClr val="0E1726"/>
-                </a:solidFill>
-                <a:latin typeface="Arial" pitchFamily="34" charset="0"/>
-                <a:ea typeface="Arial" pitchFamily="34" charset="-122"/>
-                <a:cs typeface="Arial" pitchFamily="34" charset="-120"/>
-              </a:rPr>
-              <a:t>4</a:t>
-            </a:r>
-            <a:endParaRPr lang="en-US" sz="1500" dirty="0"/>
-          </a:p>
-        </p:txBody>
-      </p:sp>
-      <p:sp>
-        <p:nvSpPr>
-          <p:cNvPr id="17" name="Text 14"/>
-          <p:cNvSpPr/>
-          <p:nvPr/>
-        </p:nvSpPr>
-        <p:spPr>
-          <a:xfrm>
-            <a:off x="1051560" y="3337560"/>
-            <a:ext cx="7589520" cy="384048"/>
-          </a:xfrm>
-          <a:prstGeom prst="rect">
-            <a:avLst/>
-          </a:prstGeom>
-          <a:noFill/>
-          <a:ln/>
-        </p:spPr>
-        <p:txBody>
-          <a:bodyPr wrap="square" lIns="0" tIns="0" rIns="0" bIns="0" rtlCol="0" anchor="ctr"/>
-          <a:lstStyle/>
-          <a:p>
-            <a:pPr indent="0" marL="0">
-              <a:buNone/>
-            </a:pPr>
-            <a:r>
-              <a:rPr lang="en-US" sz="1350" dirty="0">
-                <a:solidFill>
-                  <a:srgbClr val="1F2937"/>
-                </a:solidFill>
-                <a:latin typeface="Calibri" pitchFamily="34" charset="0"/>
-                <a:ea typeface="Calibri" pitchFamily="34" charset="-122"/>
-                <a:cs typeface="Calibri" pitchFamily="34" charset="-120"/>
-              </a:rPr>
-              <a:t>Vulnerable Dockerfile → harden + re-scan</a:t>
-            </a:r>
-            <a:endParaRPr lang="en-US" sz="1350" dirty="0"/>
-          </a:p>
-        </p:txBody>
-      </p:sp>
-      <p:sp>
-        <p:nvSpPr>
-          <p:cNvPr id="18" name="Text 15"/>
-          <p:cNvSpPr/>
-          <p:nvPr/>
-        </p:nvSpPr>
-        <p:spPr>
-          <a:xfrm>
-            <a:off x="457200" y="4800600"/>
-            <a:ext cx="6949440" cy="274320"/>
-          </a:xfrm>
-          <a:prstGeom prst="rect">
-            <a:avLst/>
-          </a:prstGeom>
-          <a:noFill/>
-          <a:ln/>
-        </p:spPr>
-        <p:txBody>
-          <a:bodyPr wrap="square" lIns="0" tIns="0" rIns="0" bIns="0" rtlCol="0" anchor="ctr"/>
-          <a:lstStyle/>
-          <a:p>
-            <a:pPr indent="0" marL="0">
-              <a:buNone/>
-            </a:pPr>
-            <a:r>
-              <a:rPr lang="en-US" sz="900" dirty="0">
-                <a:solidFill>
-                  <a:srgbClr val="64748B"/>
-                </a:solidFill>
-                <a:latin typeface="Calibri" pitchFamily="34" charset="0"/>
-                <a:ea typeface="Calibri" pitchFamily="34" charset="-122"/>
-                <a:cs typeface="Calibri" pitchFamily="34" charset="-120"/>
-              </a:rPr>
               <a:t>Software Security · Week 13</a:t>
             </a:r>
             <a:endParaRPr lang="en-US" sz="900" dirty="0"/>
@@ -2681,7 +2434,7 @@
       </p:sp>
       <p:pic>
         <p:nvPicPr>
-          <p:cNvPr id="19" name="Image 1" descr="/Users/pop7/Library/CloudStorage/OneDrive-MonsterConnectCo.,Ltd/Lecture/KOSEN69 - software-security/slides/pptx/assets/logo-small.png">    </p:cNvPr>
+          <p:cNvPr id="8" name="Image 1" descr="/Users/pop7/Library/CloudStorage/OneDrive-MonsterConnectCo.,Ltd/Lecture/KOSEN69 - software-security/slides/pptx/assets/logo-small.png">    </p:cNvPr>
           <p:cNvPicPr>
             <a:picLocks noChangeAspect="1"/>
           </p:cNvPicPr>
@@ -2819,7 +2572,7 @@
                 <a:ea typeface="Arial" pitchFamily="34" charset="-122"/>
                 <a:cs typeface="Arial" pitchFamily="34" charset="-120"/>
               </a:rPr>
-              <a:t>Deliverable</a:t>
+              <a:t>🔍 Game — Misconfig Hunt</a:t>
             </a:r>
             <a:endParaRPr lang="en-US" sz="2600" dirty="0"/>
           </a:p>
@@ -2827,36 +2580,14 @@
       </p:sp>
       <p:sp>
         <p:nvSpPr>
-          <p:cNvPr id="5" name="Shape 2"/>
-          <p:cNvSpPr/>
-          <p:nvPr/>
-        </p:nvSpPr>
-        <p:spPr>
-          <a:xfrm>
-            <a:off x="457200" y="1325880"/>
-            <a:ext cx="8229600" cy="822960"/>
-          </a:xfrm>
-          <a:prstGeom prst="roundRect">
-            <a:avLst>
-              <a:gd name="adj" fmla="val 8889"/>
-            </a:avLst>
-          </a:prstGeom>
-          <a:solidFill>
-            <a:srgbClr val="E8EDF3"/>
-          </a:solidFill>
-          <a:ln/>
-        </p:spPr>
-      </p:sp>
-      <p:sp>
-        <p:nvSpPr>
-          <p:cNvPr id="6" name="Text 3"/>
-          <p:cNvSpPr/>
-          <p:nvPr/>
-        </p:nvSpPr>
-        <p:spPr>
-          <a:xfrm>
-            <a:off x="731520" y="1325880"/>
-            <a:ext cx="7680960" cy="822960"/>
+          <p:cNvPr id="5" name="Text 2"/>
+          <p:cNvSpPr/>
+          <p:nvPr/>
+        </p:nvSpPr>
+        <p:spPr>
+          <a:xfrm>
+            <a:off x="548640" y="1325880"/>
+            <a:ext cx="8046720" cy="548640"/>
           </a:xfrm>
           <a:prstGeom prst="rect">
             <a:avLst/>
@@ -2865,22 +2596,24 @@
           <a:ln/>
         </p:spPr>
         <p:txBody>
-          <a:bodyPr wrap="square" lIns="0" tIns="0" rIns="0" bIns="0" rtlCol="0" anchor="ctr"/>
+          <a:bodyPr wrap="square" lIns="0" tIns="0" rIns="0" bIns="0" rtlCol="0" anchor="t">
+            <a:normAutofit/>
+          </a:bodyPr>
           <a:lstStyle/>
           <a:p>
             <a:pPr indent="0" marL="0">
               <a:buNone/>
             </a:pPr>
             <a:r>
-              <a:rPr lang="en-US" sz="1400" i="1" dirty="0">
-                <a:solidFill>
-                  <a:srgbClr val="E35205"/>
+              <a:rPr lang="en-US" sz="1400" dirty="0">
+                <a:solidFill>
+                  <a:srgbClr val="1F2937"/>
                 </a:solidFill>
                 <a:latin typeface="Calibri" pitchFamily="34" charset="0"/>
                 <a:ea typeface="Calibri" pitchFamily="34" charset="-122"/>
                 <a:cs typeface="Calibri" pitchFamily="34" charset="-120"/>
               </a:rPr>
-              <a:t>📋 Worksheet 13 — labs/week13-cloud-container/worksheet.md (Part 3) · kickoff: bash scan.sh (trivy config over Dockerfiles + IAM JSON)</a:t>
+              <a:t>9 flags — each misconfiguration found + explained = a flag:</a:t>
             </a:r>
             <a:endParaRPr lang="en-US" sz="1400" dirty="0"/>
           </a:p>
@@ -2888,32 +2621,62 @@
       </p:sp>
       <p:sp>
         <p:nvSpPr>
-          <p:cNvPr id="7" name="Shape 4"/>
-          <p:cNvSpPr/>
-          <p:nvPr/>
-        </p:nvSpPr>
-        <p:spPr>
-          <a:xfrm>
-            <a:off x="457200" y="2313432"/>
-            <a:ext cx="8229600" cy="1517904"/>
-          </a:xfrm>
-          <a:prstGeom prst="roundRect">
-            <a:avLst>
-              <a:gd name="adj" fmla="val 4819"/>
-            </a:avLst>
+          <p:cNvPr id="6" name="Shape 3"/>
+          <p:cNvSpPr/>
+          <p:nvPr/>
+        </p:nvSpPr>
+        <p:spPr>
+          <a:xfrm>
+            <a:off x="502920" y="1965960"/>
+            <a:ext cx="384048" cy="384048"/>
+          </a:xfrm>
+          <a:prstGeom prst="ellipse">
+            <a:avLst/>
           </a:prstGeom>
           <a:solidFill>
-            <a:srgbClr val="F1F5F9"/>
+            <a:srgbClr val="E35205"/>
           </a:solidFill>
           <a:ln/>
-          <a:effectLst>
-            <a:outerShdw sx="100000" sy="100000" kx="0" ky="0" algn="bl" rotWithShape="0" blurRad="76200" dist="25400" dir="5400000">
-              <a:srgbClr val="000000">
-                <a:alpha val="12000"/>
-              </a:srgbClr>
-            </a:outerShdw>
-          </a:effectLst>
-        </p:spPr>
+        </p:spPr>
+      </p:sp>
+      <p:sp>
+        <p:nvSpPr>
+          <p:cNvPr id="7" name="Text 4"/>
+          <p:cNvSpPr/>
+          <p:nvPr/>
+        </p:nvSpPr>
+        <p:spPr>
+          <a:xfrm>
+            <a:off x="502920" y="1965960"/>
+            <a:ext cx="384048" cy="384048"/>
+          </a:xfrm>
+          <a:prstGeom prst="rect">
+            <a:avLst/>
+          </a:prstGeom>
+          <a:noFill/>
+          <a:ln/>
+        </p:spPr>
+        <p:txBody>
+          <a:bodyPr wrap="square" lIns="0" tIns="0" rIns="0" bIns="0" rtlCol="0" anchor="ctr"/>
+          <a:lstStyle/>
+          <a:p>
+            <a:pPr algn="ctr" indent="0" marL="0">
+              <a:buNone/>
+            </a:pPr>
+            <a:r>
+              <a:rPr lang="en-US" sz="1500" b="1" dirty="0">
+                <a:solidFill>
+                  <a:srgbClr val="0E1726"/>
+                </a:solidFill>
+                <a:latin typeface="Arial" pitchFamily="34" charset="0"/>
+                <a:ea typeface="Arial" pitchFamily="34" charset="-122"/>
+                <a:cs typeface="Arial" pitchFamily="34" charset="-120"/>
+              </a:rPr>
+              <a:t>1</a:t>
+            </a:r>
+            <a:endParaRPr lang="en-US" sz="1500" dirty="0"/>
+          </a:p>
+        </p:txBody>
       </p:sp>
       <p:sp>
         <p:nvSpPr>
@@ -2923,8 +2686,8 @@
         </p:nvSpPr>
         <p:spPr>
           <a:xfrm>
-            <a:off x="731520" y="2423160"/>
-            <a:ext cx="7680960" cy="1298448"/>
+            <a:off x="1051560" y="1965960"/>
+            <a:ext cx="7589520" cy="658368"/>
           </a:xfrm>
           <a:prstGeom prst="rect">
             <a:avLst/>
@@ -2933,18 +2696,16 @@
           <a:ln/>
         </p:spPr>
         <p:txBody>
-          <a:bodyPr wrap="square" lIns="0" tIns="0" rIns="0" bIns="0" rtlCol="0" anchor="t"/>
-          <a:lstStyle/>
-          <a:p>
-            <a:pPr marL="342900" indent="-342900">
-              <a:spcAft>
-                <a:spcPts val="600"/>
-              </a:spcAft>
-              <a:buSzPct val="100000"/>
-              <a:buChar char="•"/>
-            </a:pPr>
-            <a:r>
-              <a:rPr lang="en-US" sz="1400" dirty="0">
+          <a:bodyPr wrap="square" lIns="0" tIns="0" rIns="0" bIns="0" rtlCol="0" anchor="ctr">
+            <a:normAutofit/>
+          </a:bodyPr>
+          <a:lstStyle/>
+          <a:p>
+            <a:pPr indent="0" marL="0">
+              <a:buNone/>
+            </a:pPr>
+            <a:r>
+              <a:rPr lang="en-US" sz="1350" dirty="0">
                 <a:solidFill>
                   <a:srgbClr val="1F2937"/>
                 </a:solidFill>
@@ -2952,20 +2713,99 @@
                 <a:ea typeface="Calibri" pitchFamily="34" charset="-122"/>
                 <a:cs typeface="Calibri" pitchFamily="34" charset="-120"/>
               </a:rPr>
-              <a:t>Before/after IAM policy + Dockerfile</a:t>
-            </a:r>
-            <a:endParaRPr lang="en-US" sz="1400" dirty="0"/>
-          </a:p>
-          <a:p>
-            <a:pPr marL="342900" indent="-342900">
-              <a:spcAft>
-                <a:spcPts val="600"/>
-              </a:spcAft>
-              <a:buSzPct val="100000"/>
-              <a:buChar char="•"/>
-            </a:pPr>
-            <a:r>
-              <a:rPr lang="en-US" sz="1400" dirty="0">
+              <a:t>Container (6): :latest tag, root user, secret-in-ENV, COPY . ., chmod -R 777, unpinned pip install</a:t>
+            </a:r>
+            <a:endParaRPr lang="en-US" sz="1350" dirty="0"/>
+          </a:p>
+        </p:txBody>
+      </p:sp>
+      <p:sp>
+        <p:nvSpPr>
+          <p:cNvPr id="9" name="Shape 6"/>
+          <p:cNvSpPr/>
+          <p:nvPr/>
+        </p:nvSpPr>
+        <p:spPr>
+          <a:xfrm>
+            <a:off x="502920" y="2697480"/>
+            <a:ext cx="384048" cy="384048"/>
+          </a:xfrm>
+          <a:prstGeom prst="ellipse">
+            <a:avLst/>
+          </a:prstGeom>
+          <a:solidFill>
+            <a:srgbClr val="E35205"/>
+          </a:solidFill>
+          <a:ln/>
+        </p:spPr>
+      </p:sp>
+      <p:sp>
+        <p:nvSpPr>
+          <p:cNvPr id="10" name="Text 7"/>
+          <p:cNvSpPr/>
+          <p:nvPr/>
+        </p:nvSpPr>
+        <p:spPr>
+          <a:xfrm>
+            <a:off x="502920" y="2697480"/>
+            <a:ext cx="384048" cy="384048"/>
+          </a:xfrm>
+          <a:prstGeom prst="rect">
+            <a:avLst/>
+          </a:prstGeom>
+          <a:noFill/>
+          <a:ln/>
+        </p:spPr>
+        <p:txBody>
+          <a:bodyPr wrap="square" lIns="0" tIns="0" rIns="0" bIns="0" rtlCol="0" anchor="ctr"/>
+          <a:lstStyle/>
+          <a:p>
+            <a:pPr algn="ctr" indent="0" marL="0">
+              <a:buNone/>
+            </a:pPr>
+            <a:r>
+              <a:rPr lang="en-US" sz="1500" b="1" dirty="0">
+                <a:solidFill>
+                  <a:srgbClr val="0E1726"/>
+                </a:solidFill>
+                <a:latin typeface="Arial" pitchFamily="34" charset="0"/>
+                <a:ea typeface="Arial" pitchFamily="34" charset="-122"/>
+                <a:cs typeface="Arial" pitchFamily="34" charset="-120"/>
+              </a:rPr>
+              <a:t>2</a:t>
+            </a:r>
+            <a:endParaRPr lang="en-US" sz="1500" dirty="0"/>
+          </a:p>
+        </p:txBody>
+      </p:sp>
+      <p:sp>
+        <p:nvSpPr>
+          <p:cNvPr id="11" name="Text 8"/>
+          <p:cNvSpPr/>
+          <p:nvPr/>
+        </p:nvSpPr>
+        <p:spPr>
+          <a:xfrm>
+            <a:off x="1051560" y="2697480"/>
+            <a:ext cx="7589520" cy="402336"/>
+          </a:xfrm>
+          <a:prstGeom prst="rect">
+            <a:avLst/>
+          </a:prstGeom>
+          <a:noFill/>
+          <a:ln/>
+        </p:spPr>
+        <p:txBody>
+          <a:bodyPr wrap="square" lIns="0" tIns="0" rIns="0" bIns="0" rtlCol="0" anchor="ctr">
+            <a:normAutofit/>
+          </a:bodyPr>
+          <a:lstStyle/>
+          <a:p>
+            <a:pPr indent="0" marL="0">
+              <a:buNone/>
+            </a:pPr>
+            <a:r>
+              <a:rPr lang="en-US" sz="1350" dirty="0">
                 <a:solidFill>
                   <a:srgbClr val="1F2937"/>
                 </a:solidFill>
@@ -2973,87 +2813,45 @@
                 <a:ea typeface="Calibri" pitchFamily="34" charset="-122"/>
                 <a:cs typeface="Calibri" pitchFamily="34" charset="-120"/>
               </a:rPr>
-              <a:t>Trivy reports showing reduced risk</a:t>
-            </a:r>
-            <a:endParaRPr lang="en-US" sz="1400" dirty="0"/>
-          </a:p>
-          <a:p>
-            <a:pPr marL="342900" indent="-342900">
-              <a:spcAft>
-                <a:spcPts val="600"/>
-              </a:spcAft>
-              <a:buSzPct val="100000"/>
-              <a:buChar char="•"/>
-            </a:pPr>
-            <a:r>
-              <a:rPr lang="en-US" sz="1400" dirty="0">
-                <a:solidFill>
-                  <a:srgbClr val="1F2937"/>
+              <a:t>IAM (3): Resource:"*" (CWE-732), Action:"*" (CWE-269), missing Condition scoping</a:t>
+            </a:r>
+            <a:endParaRPr lang="en-US" sz="1350" dirty="0"/>
+          </a:p>
+        </p:txBody>
+      </p:sp>
+      <p:sp>
+        <p:nvSpPr>
+          <p:cNvPr id="12" name="Text 9"/>
+          <p:cNvSpPr/>
+          <p:nvPr/>
+        </p:nvSpPr>
+        <p:spPr>
+          <a:xfrm>
+            <a:off x="457200" y="4800600"/>
+            <a:ext cx="6949440" cy="274320"/>
+          </a:xfrm>
+          <a:prstGeom prst="rect">
+            <a:avLst/>
+          </a:prstGeom>
+          <a:noFill/>
+          <a:ln/>
+        </p:spPr>
+        <p:txBody>
+          <a:bodyPr wrap="square" lIns="0" tIns="0" rIns="0" bIns="0" rtlCol="0" anchor="ctr"/>
+          <a:lstStyle/>
+          <a:p>
+            <a:pPr indent="0" marL="0">
+              <a:buNone/>
+            </a:pPr>
+            <a:r>
+              <a:rPr lang="en-US" sz="900" dirty="0">
+                <a:solidFill>
+                  <a:srgbClr val="64748B"/>
                 </a:solidFill>
                 <a:latin typeface="Calibri" pitchFamily="34" charset="0"/>
                 <a:ea typeface="Calibri" pitchFamily="34" charset="-122"/>
                 <a:cs typeface="Calibri" pitchFamily="34" charset="-120"/>
               </a:rPr>
-              <a:t>Note on secrets remediation</a:t>
-            </a:r>
-            <a:endParaRPr lang="en-US" sz="1400" dirty="0"/>
-          </a:p>
-          <a:p>
-            <a:pPr marL="342900" indent="-342900">
-              <a:spcAft>
-                <a:spcPts val="600"/>
-              </a:spcAft>
-              <a:buSzPct val="100000"/>
-              <a:buChar char="•"/>
-            </a:pPr>
-            <a:r>
-              <a:rPr lang="en-US" sz="1400" dirty="0">
-                <a:solidFill>
-                  <a:srgbClr val="1F2937"/>
-                </a:solidFill>
-                <a:latin typeface="Calibri" pitchFamily="34" charset="0"/>
-                <a:ea typeface="Calibri" pitchFamily="34" charset="-122"/>
-                <a:cs typeface="Calibri" pitchFamily="34" charset="-120"/>
-              </a:rPr>
-              <a:t>+ Audit the AI / EiPE / Prompt Problem (see worksheet)</a:t>
-            </a:r>
-            <a:endParaRPr lang="en-US" sz="1400" dirty="0"/>
-          </a:p>
-        </p:txBody>
-      </p:sp>
-      <p:sp>
-        <p:nvSpPr>
-          <p:cNvPr id="9" name="Text 6"/>
-          <p:cNvSpPr/>
-          <p:nvPr/>
-        </p:nvSpPr>
-        <p:spPr>
-          <a:xfrm>
-            <a:off x="457200" y="4800600"/>
-            <a:ext cx="6949440" cy="274320"/>
-          </a:xfrm>
-          <a:prstGeom prst="rect">
-            <a:avLst/>
-          </a:prstGeom>
-          <a:noFill/>
-          <a:ln/>
-        </p:spPr>
-        <p:txBody>
-          <a:bodyPr wrap="square" lIns="0" tIns="0" rIns="0" bIns="0" rtlCol="0" anchor="ctr"/>
-          <a:lstStyle/>
-          <a:p>
-            <a:pPr indent="0" marL="0">
-              <a:buNone/>
-            </a:pPr>
-            <a:r>
-              <a:rPr lang="en-US" sz="900" dirty="0">
-                <a:solidFill>
-                  <a:srgbClr val="64748B"/>
-                </a:solidFill>
-                <a:latin typeface="Calibri" pitchFamily="34" charset="0"/>
-                <a:ea typeface="Calibri" pitchFamily="34" charset="-122"/>
-                <a:cs typeface="Calibri" pitchFamily="34" charset="-120"/>
-              </a:rPr>
               <a:t>Software Security · Week 13</a:t>
             </a:r>
             <a:endParaRPr lang="en-US" sz="900" dirty="0"/>
@@ -3062,7 +2860,7 @@
       </p:sp>
       <p:pic>
         <p:nvPicPr>
-          <p:cNvPr id="10" name="Image 1" descr="/Users/pop7/Library/CloudStorage/OneDrive-MonsterConnectCo.,Ltd/Lecture/KOSEN69 - software-security/slides/pptx/assets/logo-small.png">    </p:cNvPr>
+          <p:cNvPr id="13" name="Image 1" descr="/Users/pop7/Library/CloudStorage/OneDrive-MonsterConnectCo.,Ltd/Lecture/KOSEN69 - software-security/slides/pptx/assets/logo-small.png">    </p:cNvPr>
           <p:cNvPicPr>
             <a:picLocks noChangeAspect="1"/>
           </p:cNvPicPr>
@@ -3200,7 +2998,7 @@
                 <a:ea typeface="Arial" pitchFamily="34" charset="-122"/>
                 <a:cs typeface="Arial" pitchFamily="34" charset="-120"/>
               </a:rPr>
-              <a:t>Key takeaways</a:t>
+              <a:t>Deliverable</a:t>
             </a:r>
             <a:endParaRPr lang="en-US" sz="2600" dirty="0"/>
           </a:p>
@@ -3215,11 +3013,74 @@
         <p:spPr>
           <a:xfrm>
             <a:off x="457200" y="1325880"/>
-            <a:ext cx="8229600" cy="1207008"/>
+            <a:ext cx="8229600" cy="1097280"/>
           </a:xfrm>
           <a:prstGeom prst="roundRect">
             <a:avLst>
-              <a:gd name="adj" fmla="val 6061"/>
+              <a:gd name="adj" fmla="val 6667"/>
+            </a:avLst>
+          </a:prstGeom>
+          <a:solidFill>
+            <a:srgbClr val="E8EDF3"/>
+          </a:solidFill>
+          <a:ln/>
+        </p:spPr>
+      </p:sp>
+      <p:sp>
+        <p:nvSpPr>
+          <p:cNvPr id="6" name="Text 3"/>
+          <p:cNvSpPr/>
+          <p:nvPr/>
+        </p:nvSpPr>
+        <p:spPr>
+          <a:xfrm>
+            <a:off x="731520" y="1325880"/>
+            <a:ext cx="7680960" cy="1097280"/>
+          </a:xfrm>
+          <a:prstGeom prst="rect">
+            <a:avLst/>
+          </a:prstGeom>
+          <a:noFill/>
+          <a:ln/>
+        </p:spPr>
+        <p:txBody>
+          <a:bodyPr wrap="square" lIns="0" tIns="0" rIns="0" bIns="0" rtlCol="0" anchor="ctr">
+            <a:normAutofit/>
+          </a:bodyPr>
+          <a:lstStyle/>
+          <a:p>
+            <a:pPr indent="0" marL="0">
+              <a:buNone/>
+            </a:pPr>
+            <a:r>
+              <a:rPr lang="en-US" sz="1400" i="1" dirty="0">
+                <a:solidFill>
+                  <a:srgbClr val="E35205"/>
+                </a:solidFill>
+                <a:latin typeface="Calibri" pitchFamily="34" charset="0"/>
+                <a:ea typeface="Calibri" pitchFamily="34" charset="-122"/>
+                <a:cs typeface="Calibri" pitchFamily="34" charset="-120"/>
+              </a:rPr>
+              <a:t>📋 Worksheet 13 — labs/week13-cloud-container/worksheet.md (Parts 1–4) · kickoff: bash scan.sh (trivy config over the Dockerfiles only — IAM JSON is manual review, Trivy doesn't parse it)</a:t>
+            </a:r>
+            <a:endParaRPr lang="en-US" sz="1400" dirty="0"/>
+          </a:p>
+        </p:txBody>
+      </p:sp>
+      <p:sp>
+        <p:nvSpPr>
+          <p:cNvPr id="7" name="Shape 4"/>
+          <p:cNvSpPr/>
+          <p:nvPr/>
+        </p:nvSpPr>
+        <p:spPr>
+          <a:xfrm>
+            <a:off x="457200" y="2587752"/>
+            <a:ext cx="8229600" cy="1517904"/>
+          </a:xfrm>
+          <a:prstGeom prst="roundRect">
+            <a:avLst>
+              <a:gd name="adj" fmla="val 4819"/>
             </a:avLst>
           </a:prstGeom>
           <a:solidFill>
@@ -3237,14 +3098,14 @@
       </p:sp>
       <p:sp>
         <p:nvSpPr>
-          <p:cNvPr id="6" name="Text 3"/>
-          <p:cNvSpPr/>
-          <p:nvPr/>
-        </p:nvSpPr>
-        <p:spPr>
-          <a:xfrm>
-            <a:off x="731520" y="1435608"/>
-            <a:ext cx="7680960" cy="987552"/>
+          <p:cNvPr id="8" name="Text 5"/>
+          <p:cNvSpPr/>
+          <p:nvPr/>
+        </p:nvSpPr>
+        <p:spPr>
+          <a:xfrm>
+            <a:off x="731520" y="2697480"/>
+            <a:ext cx="7680960" cy="1298448"/>
           </a:xfrm>
           <a:prstGeom prst="rect">
             <a:avLst/>
@@ -3253,7 +3114,9 @@
           <a:ln/>
         </p:spPr>
         <p:txBody>
-          <a:bodyPr wrap="square" lIns="0" tIns="0" rIns="0" bIns="0" rtlCol="0" anchor="t"/>
+          <a:bodyPr wrap="square" lIns="0" tIns="0" rIns="0" bIns="0" rtlCol="0" anchor="t">
+            <a:normAutofit/>
+          </a:bodyPr>
           <a:lstStyle/>
           <a:p>
             <a:pPr marL="342900" indent="-342900">
@@ -3272,7 +3135,7 @@
                 <a:ea typeface="Calibri" pitchFamily="34" charset="-122"/>
                 <a:cs typeface="Calibri" pitchFamily="34" charset="-120"/>
               </a:rPr>
-              <a:t>Misconfiguration &gt; zero-days as a breach cause</a:t>
+              <a:t>Before/after IAM policy + Dockerfile, all 9 flags explained</a:t>
             </a:r>
             <a:endParaRPr lang="en-US" sz="1400" dirty="0"/>
           </a:p>
@@ -3293,7 +3156,7 @@
                 <a:ea typeface="Calibri" pitchFamily="34" charset="-122"/>
                 <a:cs typeface="Calibri" pitchFamily="34" charset="-120"/>
               </a:rPr>
-              <a:t>Least privilege, private-by-default, no secrets in code</a:t>
+              <a:t>Trivy reports showing reduced risk (container half only)</a:t>
             </a:r>
             <a:endParaRPr lang="en-US" sz="1400" dirty="0"/>
           </a:p>
@@ -3314,45 +3177,66 @@
                 <a:ea typeface="Calibri" pitchFamily="34" charset="-122"/>
                 <a:cs typeface="Calibri" pitchFamily="34" charset="-120"/>
               </a:rPr>
-              <a:t>Scan IaC and images in CI</a:t>
+              <a:t>Note on secrets remediation</a:t>
             </a:r>
             <a:endParaRPr lang="en-US" sz="1400" dirty="0"/>
           </a:p>
-        </p:txBody>
-      </p:sp>
-      <p:sp>
-        <p:nvSpPr>
-          <p:cNvPr id="7" name="Text 4"/>
-          <p:cNvSpPr/>
-          <p:nvPr/>
-        </p:nvSpPr>
-        <p:spPr>
-          <a:xfrm>
-            <a:off x="457200" y="4800600"/>
-            <a:ext cx="6949440" cy="274320"/>
-          </a:xfrm>
-          <a:prstGeom prst="rect">
-            <a:avLst/>
-          </a:prstGeom>
-          <a:noFill/>
-          <a:ln/>
-        </p:spPr>
-        <p:txBody>
-          <a:bodyPr wrap="square" lIns="0" tIns="0" rIns="0" bIns="0" rtlCol="0" anchor="ctr"/>
-          <a:lstStyle/>
-          <a:p>
-            <a:pPr indent="0" marL="0">
-              <a:buNone/>
-            </a:pPr>
-            <a:r>
-              <a:rPr lang="en-US" sz="900" dirty="0">
-                <a:solidFill>
-                  <a:srgbClr val="64748B"/>
+          <a:p>
+            <a:pPr marL="342900" indent="-342900">
+              <a:spcAft>
+                <a:spcPts val="600"/>
+              </a:spcAft>
+              <a:buSzPct val="100000"/>
+              <a:buChar char="•"/>
+            </a:pPr>
+            <a:r>
+              <a:rPr lang="en-US" sz="1400" dirty="0">
+                <a:solidFill>
+                  <a:srgbClr val="1F2937"/>
                 </a:solidFill>
                 <a:latin typeface="Calibri" pitchFamily="34" charset="0"/>
                 <a:ea typeface="Calibri" pitchFamily="34" charset="-122"/>
                 <a:cs typeface="Calibri" pitchFamily="34" charset="-120"/>
               </a:rPr>
+              <a:t>+ Audit the AI / EiPE / Prompt Problem (see worksheet)</a:t>
+            </a:r>
+            <a:endParaRPr lang="en-US" sz="1400" dirty="0"/>
+          </a:p>
+        </p:txBody>
+      </p:sp>
+      <p:sp>
+        <p:nvSpPr>
+          <p:cNvPr id="9" name="Text 6"/>
+          <p:cNvSpPr/>
+          <p:nvPr/>
+        </p:nvSpPr>
+        <p:spPr>
+          <a:xfrm>
+            <a:off x="457200" y="4800600"/>
+            <a:ext cx="6949440" cy="274320"/>
+          </a:xfrm>
+          <a:prstGeom prst="rect">
+            <a:avLst/>
+          </a:prstGeom>
+          <a:noFill/>
+          <a:ln/>
+        </p:spPr>
+        <p:txBody>
+          <a:bodyPr wrap="square" lIns="0" tIns="0" rIns="0" bIns="0" rtlCol="0" anchor="ctr"/>
+          <a:lstStyle/>
+          <a:p>
+            <a:pPr indent="0" marL="0">
+              <a:buNone/>
+            </a:pPr>
+            <a:r>
+              <a:rPr lang="en-US" sz="900" dirty="0">
+                <a:solidFill>
+                  <a:srgbClr val="64748B"/>
+                </a:solidFill>
+                <a:latin typeface="Calibri" pitchFamily="34" charset="0"/>
+                <a:ea typeface="Calibri" pitchFamily="34" charset="-122"/>
+                <a:cs typeface="Calibri" pitchFamily="34" charset="-120"/>
+              </a:rPr>
               <a:t>Software Security · Week 13</a:t>
             </a:r>
             <a:endParaRPr lang="en-US" sz="900" dirty="0"/>
@@ -3361,7 +3245,7 @@
       </p:sp>
       <p:pic>
         <p:nvPicPr>
-          <p:cNvPr id="8" name="Image 1" descr="/Users/pop7/Library/CloudStorage/OneDrive-MonsterConnectCo.,Ltd/Lecture/KOSEN69 - software-security/slides/pptx/assets/logo-small.png">    </p:cNvPr>
+          <p:cNvPr id="10" name="Image 1" descr="/Users/pop7/Library/CloudStorage/OneDrive-MonsterConnectCo.,Ltd/Lecture/KOSEN69 - software-security/slides/pptx/assets/logo-small.png">    </p:cNvPr>
           <p:cNvPicPr>
             <a:picLocks noChangeAspect="1"/>
           </p:cNvPicPr>
@@ -3417,6 +3301,307 @@
       </p:grpSpPr>
       <p:sp>
         <p:nvSpPr>
+          <p:cNvPr id="2" name="Shape 0"/>
+          <p:cNvSpPr/>
+          <p:nvPr/>
+        </p:nvSpPr>
+        <p:spPr>
+          <a:xfrm>
+            <a:off x="457200" y="384048"/>
+            <a:ext cx="530352" cy="530352"/>
+          </a:xfrm>
+          <a:prstGeom prst="ellipse">
+            <a:avLst/>
+          </a:prstGeom>
+          <a:solidFill>
+            <a:srgbClr val="E35205"/>
+          </a:solidFill>
+          <a:ln/>
+          <a:effectLst>
+            <a:outerShdw sx="100000" sy="100000" kx="0" ky="0" algn="bl" rotWithShape="0" blurRad="76200" dist="25400" dir="5400000">
+              <a:srgbClr val="000000">
+                <a:alpha val="12000"/>
+              </a:srgbClr>
+            </a:outerShdw>
+          </a:effectLst>
+        </p:spPr>
+      </p:sp>
+      <p:pic>
+        <p:nvPicPr>
+          <p:cNvPr id="3" name="Image 0" descr="preencoded.png">    </p:cNvPr>
+          <p:cNvPicPr>
+            <a:picLocks noChangeAspect="1"/>
+          </p:cNvPicPr>
+          <p:nvPr/>
+        </p:nvPicPr>
+        <p:blipFill>
+          <a:blip r:embed="rId1"/>
+          <a:stretch>
+            <a:fillRect/>
+          </a:stretch>
+        </p:blipFill>
+        <p:spPr>
+          <a:xfrm>
+            <a:off x="594360" y="521208"/>
+            <a:ext cx="256032" cy="256032"/>
+          </a:xfrm>
+          <a:prstGeom prst="rect">
+            <a:avLst/>
+          </a:prstGeom>
+        </p:spPr>
+      </p:pic>
+      <p:sp>
+        <p:nvSpPr>
+          <p:cNvPr id="4" name="Text 1"/>
+          <p:cNvSpPr/>
+          <p:nvPr/>
+        </p:nvSpPr>
+        <p:spPr>
+          <a:xfrm>
+            <a:off x="1143000" y="329184"/>
+            <a:ext cx="7498080" cy="603504"/>
+          </a:xfrm>
+          <a:prstGeom prst="rect">
+            <a:avLst/>
+          </a:prstGeom>
+          <a:noFill/>
+          <a:ln/>
+        </p:spPr>
+        <p:txBody>
+          <a:bodyPr wrap="square" lIns="0" tIns="0" rIns="0" bIns="0" rtlCol="0" anchor="ctr"/>
+          <a:lstStyle/>
+          <a:p>
+            <a:pPr indent="0" marL="0">
+              <a:buNone/>
+            </a:pPr>
+            <a:r>
+              <a:rPr lang="en-US" sz="2600" b="1" dirty="0">
+                <a:solidFill>
+                  <a:srgbClr val="1F2937"/>
+                </a:solidFill>
+                <a:latin typeface="Arial" pitchFamily="34" charset="0"/>
+                <a:ea typeface="Arial" pitchFamily="34" charset="-122"/>
+                <a:cs typeface="Arial" pitchFamily="34" charset="-120"/>
+              </a:rPr>
+              <a:t>Key takeaways</a:t>
+            </a:r>
+            <a:endParaRPr lang="en-US" sz="2600" dirty="0"/>
+          </a:p>
+        </p:txBody>
+      </p:sp>
+      <p:sp>
+        <p:nvSpPr>
+          <p:cNvPr id="5" name="Shape 2"/>
+          <p:cNvSpPr/>
+          <p:nvPr/>
+        </p:nvSpPr>
+        <p:spPr>
+          <a:xfrm>
+            <a:off x="457200" y="1325880"/>
+            <a:ext cx="8229600" cy="1207008"/>
+          </a:xfrm>
+          <a:prstGeom prst="roundRect">
+            <a:avLst>
+              <a:gd name="adj" fmla="val 6061"/>
+            </a:avLst>
+          </a:prstGeom>
+          <a:solidFill>
+            <a:srgbClr val="F1F5F9"/>
+          </a:solidFill>
+          <a:ln/>
+          <a:effectLst>
+            <a:outerShdw sx="100000" sy="100000" kx="0" ky="0" algn="bl" rotWithShape="0" blurRad="76200" dist="25400" dir="5400000">
+              <a:srgbClr val="000000">
+                <a:alpha val="12000"/>
+              </a:srgbClr>
+            </a:outerShdw>
+          </a:effectLst>
+        </p:spPr>
+      </p:sp>
+      <p:sp>
+        <p:nvSpPr>
+          <p:cNvPr id="6" name="Text 3"/>
+          <p:cNvSpPr/>
+          <p:nvPr/>
+        </p:nvSpPr>
+        <p:spPr>
+          <a:xfrm>
+            <a:off x="731520" y="1435608"/>
+            <a:ext cx="7680960" cy="987552"/>
+          </a:xfrm>
+          <a:prstGeom prst="rect">
+            <a:avLst/>
+          </a:prstGeom>
+          <a:noFill/>
+          <a:ln/>
+        </p:spPr>
+        <p:txBody>
+          <a:bodyPr wrap="square" lIns="0" tIns="0" rIns="0" bIns="0" rtlCol="0" anchor="t">
+            <a:normAutofit/>
+          </a:bodyPr>
+          <a:lstStyle/>
+          <a:p>
+            <a:pPr marL="342900" indent="-342900">
+              <a:spcAft>
+                <a:spcPts val="600"/>
+              </a:spcAft>
+              <a:buSzPct val="100000"/>
+              <a:buChar char="•"/>
+            </a:pPr>
+            <a:r>
+              <a:rPr lang="en-US" sz="1400" dirty="0">
+                <a:solidFill>
+                  <a:srgbClr val="1F2937"/>
+                </a:solidFill>
+                <a:latin typeface="Calibri" pitchFamily="34" charset="0"/>
+                <a:ea typeface="Calibri" pitchFamily="34" charset="-122"/>
+                <a:cs typeface="Calibri" pitchFamily="34" charset="-120"/>
+              </a:rPr>
+              <a:t>Misconfiguration &gt; zero-days as a breach cause</a:t>
+            </a:r>
+            <a:endParaRPr lang="en-US" sz="1400" dirty="0"/>
+          </a:p>
+          <a:p>
+            <a:pPr marL="342900" indent="-342900">
+              <a:spcAft>
+                <a:spcPts val="600"/>
+              </a:spcAft>
+              <a:buSzPct val="100000"/>
+              <a:buChar char="•"/>
+            </a:pPr>
+            <a:r>
+              <a:rPr lang="en-US" sz="1400" dirty="0">
+                <a:solidFill>
+                  <a:srgbClr val="1F2937"/>
+                </a:solidFill>
+                <a:latin typeface="Calibri" pitchFamily="34" charset="0"/>
+                <a:ea typeface="Calibri" pitchFamily="34" charset="-122"/>
+                <a:cs typeface="Calibri" pitchFamily="34" charset="-120"/>
+              </a:rPr>
+              <a:t>Least privilege, private-by-default, no secrets in code</a:t>
+            </a:r>
+            <a:endParaRPr lang="en-US" sz="1400" dirty="0"/>
+          </a:p>
+          <a:p>
+            <a:pPr marL="342900" indent="-342900">
+              <a:spcAft>
+                <a:spcPts val="600"/>
+              </a:spcAft>
+              <a:buSzPct val="100000"/>
+              <a:buChar char="•"/>
+            </a:pPr>
+            <a:r>
+              <a:rPr lang="en-US" sz="1400" dirty="0">
+                <a:solidFill>
+                  <a:srgbClr val="1F2937"/>
+                </a:solidFill>
+                <a:latin typeface="Calibri" pitchFamily="34" charset="0"/>
+                <a:ea typeface="Calibri" pitchFamily="34" charset="-122"/>
+                <a:cs typeface="Calibri" pitchFamily="34" charset="-120"/>
+              </a:rPr>
+              <a:t>Scan IaC and images in CI</a:t>
+            </a:r>
+            <a:endParaRPr lang="en-US" sz="1400" dirty="0"/>
+          </a:p>
+        </p:txBody>
+      </p:sp>
+      <p:sp>
+        <p:nvSpPr>
+          <p:cNvPr id="7" name="Text 4"/>
+          <p:cNvSpPr/>
+          <p:nvPr/>
+        </p:nvSpPr>
+        <p:spPr>
+          <a:xfrm>
+            <a:off x="457200" y="4800600"/>
+            <a:ext cx="6949440" cy="274320"/>
+          </a:xfrm>
+          <a:prstGeom prst="rect">
+            <a:avLst/>
+          </a:prstGeom>
+          <a:noFill/>
+          <a:ln/>
+        </p:spPr>
+        <p:txBody>
+          <a:bodyPr wrap="square" lIns="0" tIns="0" rIns="0" bIns="0" rtlCol="0" anchor="ctr"/>
+          <a:lstStyle/>
+          <a:p>
+            <a:pPr indent="0" marL="0">
+              <a:buNone/>
+            </a:pPr>
+            <a:r>
+              <a:rPr lang="en-US" sz="900" dirty="0">
+                <a:solidFill>
+                  <a:srgbClr val="64748B"/>
+                </a:solidFill>
+                <a:latin typeface="Calibri" pitchFamily="34" charset="0"/>
+                <a:ea typeface="Calibri" pitchFamily="34" charset="-122"/>
+                <a:cs typeface="Calibri" pitchFamily="34" charset="-120"/>
+              </a:rPr>
+              <a:t>Software Security · Week 13</a:t>
+            </a:r>
+            <a:endParaRPr lang="en-US" sz="900" dirty="0"/>
+          </a:p>
+        </p:txBody>
+      </p:sp>
+      <p:pic>
+        <p:nvPicPr>
+          <p:cNvPr id="8" name="Image 1" descr="/Users/pop7/Library/CloudStorage/OneDrive-MonsterConnectCo.,Ltd/Lecture/KOSEN69 - software-security/slides/pptx/assets/logo-small.png">    </p:cNvPr>
+          <p:cNvPicPr>
+            <a:picLocks noChangeAspect="1"/>
+          </p:cNvPicPr>
+          <p:nvPr/>
+        </p:nvPicPr>
+        <p:blipFill>
+          <a:blip r:embed="rId2"/>
+          <a:stretch>
+            <a:fillRect/>
+          </a:stretch>
+        </p:blipFill>
+        <p:spPr>
+          <a:xfrm>
+            <a:off x="7882128" y="4700016"/>
+            <a:ext cx="768096" cy="356616"/>
+          </a:xfrm>
+          <a:prstGeom prst="rect">
+            <a:avLst/>
+          </a:prstGeom>
+        </p:spPr>
+      </p:pic>
+    </p:spTree>
+  </p:cSld>
+  <p:clrMapOvr>
+    <a:masterClrMapping/>
+  </p:clrMapOvr>
+</p:sld>
+</file>
+
+<file path=ppt/slides/slide14.xml><?xml version="1.0" encoding="utf-8"?>
+<p:sld xmlns:a="http://schemas.openxmlformats.org/drawingml/2006/main" xmlns:r="http://schemas.openxmlformats.org/officeDocument/2006/relationships" xmlns:p="http://schemas.openxmlformats.org/presentationml/2006/main">
+  <p:cSld name="Slide 14">
+    <p:bg>
+      <p:bgPr>
+        <a:solidFill>
+          <a:srgbClr val="FFFFFF"/>
+        </a:solidFill>
+      </p:bgPr>
+    </p:bg>
+    <p:spTree>
+      <p:nvGrpSpPr>
+        <p:cNvPr id="1" name=""/>
+        <p:cNvGrpSpPr/>
+        <p:nvPr/>
+      </p:nvGrpSpPr>
+      <p:grpSpPr>
+        <a:xfrm>
+          <a:off x="0" y="0"/>
+          <a:ext cx="0" cy="0"/>
+          <a:chOff x="0" y="0"/>
+          <a:chExt cx="0" cy="0"/>
+        </a:xfrm>
+      </p:grpSpPr>
+      <p:sp>
+        <p:nvSpPr>
           <p:cNvPr id="2" name="Text 0"/>
           <p:cNvSpPr/>
           <p:nvPr/>
@@ -3686,7 +3871,9 @@
           <a:ln/>
         </p:spPr>
         <p:txBody>
-          <a:bodyPr wrap="square" lIns="0" tIns="0" rIns="0" bIns="0" rtlCol="0" anchor="t"/>
+          <a:bodyPr wrap="square" lIns="0" tIns="0" rIns="0" bIns="0" rtlCol="0" anchor="t">
+            <a:normAutofit/>
+          </a:bodyPr>
           <a:lstStyle/>
           <a:p>
             <a:pPr marL="342900" indent="-342900">
@@ -4027,7 +4214,9 @@
           <a:ln/>
         </p:spPr>
         <p:txBody>
-          <a:bodyPr wrap="square" lIns="0" tIns="0" rIns="0" bIns="0" rtlCol="0" anchor="t"/>
+          <a:bodyPr wrap="square" lIns="0" tIns="0" rIns="0" bIns="0" rtlCol="0" anchor="t">
+            <a:normAutofit/>
+          </a:bodyPr>
           <a:lstStyle/>
           <a:p>
             <a:pPr marL="342900" indent="-342900">
@@ -4326,7 +4515,9 @@
           <a:ln/>
         </p:spPr>
         <p:txBody>
-          <a:bodyPr wrap="square" lIns="0" tIns="0" rIns="0" bIns="0" rtlCol="0" anchor="t"/>
+          <a:bodyPr wrap="square" lIns="0" tIns="0" rIns="0" bIns="0" rtlCol="0" anchor="t">
+            <a:normAutofit/>
+          </a:bodyPr>
           <a:lstStyle/>
           <a:p>
             <a:pPr marL="342900" indent="-342900">
@@ -4587,11 +4778,11 @@
         <p:spPr>
           <a:xfrm>
             <a:off x="457200" y="1325880"/>
-            <a:ext cx="8229600" cy="530352"/>
+            <a:ext cx="8229600" cy="493776"/>
           </a:xfrm>
           <a:prstGeom prst="roundRect">
             <a:avLst>
-              <a:gd name="adj" fmla="val 10345"/>
+              <a:gd name="adj" fmla="val 11111"/>
             </a:avLst>
           </a:prstGeom>
           <a:solidFill>
@@ -4614,7 +4805,7 @@
         <p:spPr>
           <a:xfrm>
             <a:off x="640080" y="1399032"/>
-            <a:ext cx="7863840" cy="384048"/>
+            <a:ext cx="7863840" cy="347472"/>
           </a:xfrm>
           <a:prstGeom prst="rect">
             <a:avLst/>
@@ -4623,7 +4814,9 @@
           <a:ln/>
         </p:spPr>
         <p:txBody>
-          <a:bodyPr wrap="square" lIns="0" tIns="0" rIns="0" bIns="0" rtlCol="0" anchor="t"/>
+          <a:bodyPr wrap="square" lIns="0" tIns="0" rIns="0" bIns="0" rtlCol="0" anchor="t">
+            <a:normAutofit/>
+          </a:bodyPr>
           <a:lstStyle/>
           <a:p>
             <a:pPr indent="0" marL="0">
@@ -4652,12 +4845,12 @@
         </p:nvSpPr>
         <p:spPr>
           <a:xfrm>
-            <a:off x="457200" y="2020824"/>
-            <a:ext cx="8229600" cy="1207008"/>
+            <a:off x="457200" y="1984248"/>
+            <a:ext cx="8229600" cy="1810512"/>
           </a:xfrm>
           <a:prstGeom prst="roundRect">
             <a:avLst>
-              <a:gd name="adj" fmla="val 6061"/>
+              <a:gd name="adj" fmla="val 4040"/>
             </a:avLst>
           </a:prstGeom>
           <a:solidFill>
@@ -4681,8 +4874,8 @@
         </p:nvSpPr>
         <p:spPr>
           <a:xfrm>
-            <a:off x="731520" y="2130552"/>
-            <a:ext cx="7680960" cy="987552"/>
+            <a:off x="731520" y="2093976"/>
+            <a:ext cx="7680960" cy="1591056"/>
           </a:xfrm>
           <a:prstGeom prst="rect">
             <a:avLst/>
@@ -4691,7 +4884,9 @@
           <a:ln/>
         </p:spPr>
         <p:txBody>
-          <a:bodyPr wrap="square" lIns="0" tIns="0" rIns="0" bIns="0" rtlCol="0" anchor="t"/>
+          <a:bodyPr wrap="square" lIns="0" tIns="0" rIns="0" bIns="0" rtlCol="0" anchor="t">
+            <a:normAutofit/>
+          </a:bodyPr>
           <a:lstStyle/>
           <a:p>
             <a:pPr marL="342900" indent="-342900">
@@ -4731,7 +4926,7 @@
                 <a:ea typeface="Calibri" pitchFamily="34" charset="-122"/>
                 <a:cs typeface="Calibri" pitchFamily="34" charset="-120"/>
               </a:rPr>
-              <a:t>Grant only the actions/resources needed</a:t>
+              <a:t>Resource:"*" → CWE-732 (incorrect permission assignment); Action:"*" → CWE-269 (improper privilege management) — they're graded as two distinct findings on the same policy, not one</a:t>
             </a:r>
             <a:endParaRPr lang="en-US" sz="1400" dirty="0"/>
           </a:p>
@@ -4752,7 +4947,7 @@
                 <a:ea typeface="Calibri" pitchFamily="34" charset="-122"/>
                 <a:cs typeface="Calibri" pitchFamily="34" charset="-120"/>
               </a:rPr>
-              <a:t>CWE-732 (bad permissions), CWE-16 (config)</a:t>
+              <a:t>Fix: scope to one bucket + one action, add a Condition (e.g. s3:prefix) — not just a narrower ARN</a:t>
             </a:r>
             <a:endParaRPr lang="en-US" sz="1400" dirty="0"/>
           </a:p>
@@ -4990,7 +5185,9 @@
           <a:ln/>
         </p:spPr>
         <p:txBody>
-          <a:bodyPr wrap="square" lIns="0" tIns="0" rIns="0" bIns="0" rtlCol="0" anchor="t"/>
+          <a:bodyPr wrap="square" lIns="0" tIns="0" rIns="0" bIns="0" rtlCol="0" anchor="t">
+            <a:normAutofit/>
+          </a:bodyPr>
           <a:lstStyle/>
           <a:p>
             <a:pPr marL="342900" indent="-342900">
@@ -5289,7 +5486,9 @@
           <a:ln/>
         </p:spPr>
         <p:txBody>
-          <a:bodyPr wrap="square" lIns="0" tIns="0" rIns="0" bIns="0" rtlCol="0" anchor="t"/>
+          <a:bodyPr wrap="square" lIns="0" tIns="0" rIns="0" bIns="0" rtlCol="0" anchor="t">
+            <a:normAutofit/>
+          </a:bodyPr>
           <a:lstStyle/>
           <a:p>
             <a:pPr marL="342900" indent="-342900">
@@ -5550,11 +5749,11 @@
         <p:spPr>
           <a:xfrm>
             <a:off x="457200" y="1325880"/>
-            <a:ext cx="8229600" cy="786384"/>
+            <a:ext cx="8229600" cy="932688"/>
           </a:xfrm>
           <a:prstGeom prst="roundRect">
             <a:avLst>
-              <a:gd name="adj" fmla="val 6977"/>
+              <a:gd name="adj" fmla="val 5882"/>
             </a:avLst>
           </a:prstGeom>
           <a:solidFill>
@@ -5577,7 +5776,7 @@
         <p:spPr>
           <a:xfrm>
             <a:off x="640080" y="1399032"/>
-            <a:ext cx="7863840" cy="640080"/>
+            <a:ext cx="7863840" cy="786384"/>
           </a:xfrm>
           <a:prstGeom prst="rect">
             <a:avLst/>
@@ -5586,7 +5785,9 @@
           <a:ln/>
         </p:spPr>
         <p:txBody>
-          <a:bodyPr wrap="square" lIns="0" tIns="0" rIns="0" bIns="0" rtlCol="0" anchor="t"/>
+          <a:bodyPr wrap="square" lIns="0" tIns="0" rIns="0" bIns="0" rtlCol="0" anchor="t">
+            <a:normAutofit/>
+          </a:bodyPr>
           <a:lstStyle/>
           <a:p>
             <a:pPr indent="0" marL="0">
@@ -5601,7 +5802,7 @@
                 <a:ea typeface="Courier New" pitchFamily="34" charset="-122"/>
                 <a:cs typeface="Courier New" pitchFamily="34" charset="-120"/>
               </a:rPr>
-              <a:t>trivy config /src       # IaC/Dockerfile misconfig</a:t>
+              <a:t>docker run --rm -v "$PWD:/src" aquasec/trivy config /src                    # misconfig</a:t>
             </a:r>
             <a:endParaRPr lang="en-US" sz="1150" dirty="0"/>
           </a:p>
@@ -5618,10 +5819,27 @@
                 <a:ea typeface="Courier New" pitchFamily="34" charset="-122"/>
                 <a:cs typeface="Courier New" pitchFamily="34" charset="-120"/>
               </a:rPr>
-              <a:t>trivy image myapp:lab   # image CVEs</a:t>
+              <a:t>docker run --rm -v /var/run/docker.sock:/var/run/docker.sock \</a:t>
             </a:r>
             <a:endParaRPr lang="en-US" sz="1150" dirty="0"/>
           </a:p>
+          <a:p>
+            <a:pPr indent="0" marL="0">
+              <a:buNone/>
+            </a:pPr>
+            <a:r>
+              <a:rPr lang="en-US" sz="1150" dirty="0">
+                <a:solidFill>
+                  <a:srgbClr val="9FE7D6"/>
+                </a:solidFill>
+                <a:latin typeface="Courier New" pitchFamily="34" charset="0"/>
+                <a:ea typeface="Courier New" pitchFamily="34" charset="-122"/>
+                <a:cs typeface="Courier New" pitchFamily="34" charset="-120"/>
+              </a:rPr>
+              <a:t>  aquasec/trivy image week13-hardened:lab                              # image CVEs</a:t>
+            </a:r>
+            <a:endParaRPr lang="en-US" sz="1150" dirty="0"/>
+          </a:p>
         </p:txBody>
       </p:sp>
       <p:sp>
@@ -5632,12 +5850,12 @@
         </p:nvSpPr>
         <p:spPr>
           <a:xfrm>
-            <a:off x="457200" y="2276856"/>
-            <a:ext cx="8229600" cy="896112"/>
+            <a:off x="457200" y="2423160"/>
+            <a:ext cx="8229600" cy="1810512"/>
           </a:xfrm>
           <a:prstGeom prst="roundRect">
             <a:avLst>
-              <a:gd name="adj" fmla="val 8163"/>
+              <a:gd name="adj" fmla="val 4040"/>
             </a:avLst>
           </a:prstGeom>
           <a:solidFill>
@@ -5661,8 +5879,8 @@
         </p:nvSpPr>
         <p:spPr>
           <a:xfrm>
-            <a:off x="731520" y="2386584"/>
-            <a:ext cx="7680960" cy="676656"/>
+            <a:off x="731520" y="2532888"/>
+            <a:ext cx="7680960" cy="1591056"/>
           </a:xfrm>
           <a:prstGeom prst="rect">
             <a:avLst/>
@@ -5671,7 +5889,9 @@
           <a:ln/>
         </p:spPr>
         <p:txBody>
-          <a:bodyPr wrap="square" lIns="0" tIns="0" rIns="0" bIns="0" rtlCol="0" anchor="t"/>
+          <a:bodyPr wrap="square" lIns="0" tIns="0" rIns="0" bIns="0" rtlCol="0" anchor="t">
+            <a:normAutofit/>
+          </a:bodyPr>
           <a:lstStyle/>
           <a:p>
             <a:pPr marL="342900" indent="-342900">
@@ -5690,7 +5910,28 @@
                 <a:ea typeface="Calibri" pitchFamily="34" charset="-122"/>
                 <a:cs typeface="Calibri" pitchFamily="34" charset="-120"/>
               </a:rPr>
-              <a:t>Minimal/distroless base, drop root, pin versions</a:t>
+              <a:t>Multi-stage build: python:3.11-slim@sha256:... (compiles) → distroless gcr.io/distroless/python3-debian12@sha256:... (runs) — a smaller runtime image with no shell/package manager, USER 65532:65532 (non-root)</a:t>
+            </a:r>
+            <a:endParaRPr lang="en-US" sz="1400" dirty="0"/>
+          </a:p>
+          <a:p>
+            <a:pPr marL="342900" indent="-342900">
+              <a:spcAft>
+                <a:spcPts val="600"/>
+              </a:spcAft>
+              <a:buSzPct val="100000"/>
+              <a:buChar char="•"/>
+            </a:pPr>
+            <a:r>
+              <a:rPr lang="en-US" sz="1400" dirty="0">
+                <a:solidFill>
+                  <a:srgbClr val="1F2937"/>
+                </a:solidFill>
+                <a:latin typeface="Calibri" pitchFamily="34" charset="0"/>
+                <a:ea typeface="Calibri" pitchFamily="34" charset="-122"/>
+                <a:cs typeface="Calibri" pitchFamily="34" charset="-120"/>
+              </a:rPr>
+              <a:t>@sha256:... digest pins, not just a version tag — a tag can be repointed later, a digest can't</a:t>
             </a:r>
             <a:endParaRPr lang="en-US" sz="1400" dirty="0"/>
           </a:p>
@@ -5896,7 +6137,7 @@
                 <a:ea typeface="Arial" pitchFamily="34" charset="-122"/>
                 <a:cs typeface="Arial" pitchFamily="34" charset="-120"/>
               </a:rPr>
-              <a:t>Kubernetes basics (awareness)</a:t>
+              <a:t>Container image hardening (cont.)</a:t>
             </a:r>
             <a:endParaRPr lang="en-US" sz="2600" dirty="0"/>
           </a:p>
@@ -5911,11 +6152,11 @@
         <p:spPr>
           <a:xfrm>
             <a:off x="457200" y="1325880"/>
-            <a:ext cx="8229600" cy="896112"/>
+            <a:ext cx="8229600" cy="987552"/>
           </a:xfrm>
           <a:prstGeom prst="roundRect">
             <a:avLst>
-              <a:gd name="adj" fmla="val 8163"/>
+              <a:gd name="adj" fmla="val 7407"/>
             </a:avLst>
           </a:prstGeom>
           <a:solidFill>
@@ -5940,7 +6181,7 @@
         <p:spPr>
           <a:xfrm>
             <a:off x="731520" y="1435608"/>
-            <a:ext cx="7680960" cy="676656"/>
+            <a:ext cx="7680960" cy="768096"/>
           </a:xfrm>
           <a:prstGeom prst="rect">
             <a:avLst/>
@@ -5949,7 +6190,9 @@
           <a:ln/>
         </p:spPr>
         <p:txBody>
-          <a:bodyPr wrap="square" lIns="0" tIns="0" rIns="0" bIns="0" rtlCol="0" anchor="t"/>
+          <a:bodyPr wrap="square" lIns="0" tIns="0" rIns="0" bIns="0" rtlCol="0" anchor="t">
+            <a:normAutofit/>
+          </a:bodyPr>
           <a:lstStyle/>
           <a:p>
             <a:pPr marL="342900" indent="-342900">
@@ -5968,28 +6211,7 @@
                 <a:ea typeface="Calibri" pitchFamily="34" charset="-122"/>
                 <a:cs typeface="Calibri" pitchFamily="34" charset="-120"/>
               </a:rPr>
-              <a:t>Pod security, network policies, RBAC</a:t>
-            </a:r>
-            <a:endParaRPr lang="en-US" sz="1400" dirty="0"/>
-          </a:p>
-          <a:p>
-            <a:pPr marL="342900" indent="-342900">
-              <a:spcAft>
-                <a:spcPts val="600"/>
-              </a:spcAft>
-              <a:buSzPct val="100000"/>
-              <a:buChar char="•"/>
-            </a:pPr>
-            <a:r>
-              <a:rPr lang="en-US" sz="1400" dirty="0">
-                <a:solidFill>
-                  <a:srgbClr val="1F2937"/>
-                </a:solidFill>
-                <a:latin typeface="Calibri" pitchFamily="34" charset="0"/>
-                <a:ea typeface="Calibri" pitchFamily="34" charset="-122"/>
-                <a:cs typeface="Calibri" pitchFamily="34" charset="-120"/>
-              </a:rPr>
-              <a:t>Don't run privileged; limit service-account tokens</a:t>
+              <a:t>Trivy only catches 3 of 6 planted defects (:latest, root user, secret-in-ENV) — COPY . ., chmod -R 777, and unpinned pip install need manual review, no rule fires</a:t>
             </a:r>
             <a:endParaRPr lang="en-US" sz="1400" dirty="0"/>
           </a:p>

--- a/slides/pptx/week13.pptx
+++ b/slides/pptx/week13.pptx
@@ -19,9 +19,10 @@
     <p:sldId id="267" r:id="rId13"/>
     <p:sldId id="268" r:id="rId14"/>
     <p:sldId id="269" r:id="rId15"/>
+    <p:sldId id="270" r:id="rId16"/>
   </p:sldIdLst>
   <p:notesMasterIdLst>
-    <p:notesMasterId r:id="rId16"/>
+    <p:notesMasterId r:id="rId17"/>
   </p:notesMasterIdLst>
   <p:sldSz cx="9144000" cy="5143500"/>
   <p:notesSz cx="5143500" cy="9144000"/>
@@ -691,7 +692,7 @@
           <a:p>
             <a:r>
               <a:rPr lang="en-US" dirty="0"/>
-              <a:t>Explain before lab: 9 flags total, two categories only — no separate bucket/storage flag, no IaC/localstack target exists in this lab. Find AND explain (why it's a finding, which fix applies) = the flag. Q6 of the quiz asks for one misconfig they explained + the principle it violated. ~3 min.</a:t>
+              <a:t>The whole lab's argument as one picture — walk it row by row once, landing on the Trivy split at the bottom: 3 rows have a rule ID to cite, 4 don't. That 3-of-7 (or "3 of 6" container-only, per the earlier slide) split is Task 1's actual grading rubric, not trivia. ~5 min.</a:t>
             </a:r>
             <a:endParaRPr lang="en-US" dirty="0"/>
           </a:p>
@@ -779,7 +780,7 @@
           <a:p>
             <a:r>
               <a:rPr lang="en-US" dirty="0"/>
-              <a:t>Before/after artifacts + the trivy delta prove the container-side fix; IAM has no scanner delta to show, it's reasoned/written. Don't let "trivy over Dockerfiles + IAM JSON" stand — that's the exact misconception this lab's own history already fixed once. AI-resilient tasks count.</a:t>
+              <a:t>Explain before lab: 9 flags total, two categories only — no separate bucket/storage flag, no IaC/localstack target exists in this lab. Find AND explain (why it's a finding, which fix applies) = the flag. Q6 of the quiz asks for one misconfig they explained + the principle it violated. ~3 min.</a:t>
             </a:r>
             <a:endParaRPr lang="en-US" dirty="0"/>
           </a:p>
@@ -867,7 +868,7 @@
           <a:p>
             <a:r>
               <a:rPr lang="en-US" dirty="0"/>
-              <a:t>Recap. Cold-call: "what does a `*:*` IAM policy cost you if the key leaks?" (everything — full blast radius). "Scan in CI" sets up W15. ~2 min.</a:t>
+              <a:t>Before/after artifacts + the trivy delta prove the container-side fix; IAM has no scanner delta to show, it's reasoned/written. Don't let "trivy over Dockerfiles + IAM JSON" stand — that's the exact misconception this lab's own history already fixed once. AI-resilient tasks count.</a:t>
             </a:r>
             <a:endParaRPr lang="en-US" dirty="0"/>
           </a:p>
@@ -955,7 +956,7 @@
           <a:p>
             <a:r>
               <a:rPr lang="en-US" dirty="0"/>
-              <a:t>Cliffhanger: "Next week — the newest attack surface: make an AI assistant ignore its rules and leak secrets, with nothing but text."</a:t>
+              <a:t>Recap. Cold-call: "what does a `*:*` IAM policy cost you if the key leaks?" (everything — full blast radius). "Scan in CI" sets up W15. ~2 min.</a:t>
             </a:r>
             <a:endParaRPr lang="en-US" dirty="0"/>
           </a:p>
@@ -979,6 +980,94 @@
             <a:fld id="{F7021451-1387-4CA6-816F-3879F97B5CBC}" type="slidenum">
               <a:rPr lang="en-US"/>
               <a:t>14</a:t>
+            </a:fld>
+            <a:endParaRPr lang="en-US"/>
+          </a:p>
+        </p:txBody>
+      </p:sp>
+    </p:spTree>
+    <p:extLst>
+      <p:ext uri="{BB962C8B-B14F-4D97-AF65-F5344CB8AC3E}">
+        <p14:creationId xmlns:p14="http://schemas.microsoft.com/office/powerpoint/2010/main" val="1024086991"/>
+      </p:ext>
+    </p:extLst>
+  </p:cSld>
+  <p:clrMapOvr>
+    <a:masterClrMapping/>
+  </p:clrMapOvr>
+</p:notes>
+</file>
+
+<file path=ppt/notesSlides/notesSlide15.xml><?xml version="1.0" encoding="utf-8"?>
+<p:notes xmlns:a="http://schemas.openxmlformats.org/drawingml/2006/main" xmlns:r="http://schemas.openxmlformats.org/officeDocument/2006/relationships" xmlns:p="http://schemas.openxmlformats.org/presentationml/2006/main">
+  <p:cSld>
+    <p:spTree>
+      <p:nvGrpSpPr>
+        <p:cNvPr id="1" name=""/>
+        <p:cNvGrpSpPr/>
+        <p:nvPr/>
+      </p:nvGrpSpPr>
+      <p:grpSpPr>
+        <a:xfrm>
+          <a:off x="0" y="0"/>
+          <a:ext cx="0" cy="0"/>
+          <a:chOff x="0" y="0"/>
+          <a:chExt cx="0" cy="0"/>
+        </a:xfrm>
+      </p:grpSpPr>
+      <p:sp>
+        <p:nvSpPr>
+          <p:cNvPr id="2" name="Slide Image Placeholder 1"/>
+          <p:cNvSpPr>
+            <a:spLocks noGrp="1" noRot="1" noChangeAspect="1"/>
+          </p:cNvSpPr>
+          <p:nvPr>
+            <p:ph type="sldImg"/>
+          </p:nvPr>
+        </p:nvSpPr>
+        <p:spPr/>
+      </p:sp>
+      <p:sp>
+        <p:nvSpPr>
+          <p:cNvPr id="3" name="Notes Placeholder 2"/>
+          <p:cNvSpPr>
+            <a:spLocks noGrp="1"/>
+          </p:cNvSpPr>
+          <p:nvPr>
+            <p:ph type="body" idx="1"/>
+          </p:nvPr>
+        </p:nvSpPr>
+        <p:spPr/>
+        <p:txBody>
+          <a:bodyPr/>
+          <a:lstStyle/>
+          <a:p>
+            <a:r>
+              <a:rPr lang="en-US" dirty="0"/>
+              <a:t>Cliffhanger: "Next week — the newest attack surface: make an AI assistant ignore its rules and leak secrets, with nothing but text."</a:t>
+            </a:r>
+            <a:endParaRPr lang="en-US" dirty="0"/>
+          </a:p>
+        </p:txBody>
+      </p:sp>
+      <p:sp>
+        <p:nvSpPr>
+          <p:cNvPr id="4" name="Slide Number Placeholder 3"/>
+          <p:cNvSpPr>
+            <a:spLocks noGrp="1"/>
+          </p:cNvSpPr>
+          <p:nvPr>
+            <p:ph type="sldNum" sz="quarter" idx="10"/>
+          </p:nvPr>
+        </p:nvSpPr>
+        <p:spPr/>
+        <p:txBody>
+          <a:bodyPr/>
+          <a:lstStyle/>
+          <a:p>
+            <a:fld id="{F7021451-1387-4CA6-816F-3879F97B5CBC}" type="slidenum">
+              <a:rPr lang="en-US"/>
+              <a:t>15</a:t>
             </a:fld>
             <a:endParaRPr lang="en-US"/>
           </a:p>
@@ -1307,7 +1396,7 @@
           <a:p>
             <a:r>
               <a:rPr lang="en-US" dirty="0"/>
-              <a:t>The worked example — this `*:*` policy is the Misconfig Hunt round 1 and the quiz. If a credential with this leaks, the attacker owns everything. This is 100% manual review — Trivy's config scanner does not parse standalone IAM JSON at all, say so explicitly so students don't wait for a scanner to flag it. Ask the class to rewrite it as read-only on one bucket, with a Condition. Least privilege = smallest possible blast radius. ~6 min.</a:t>
+              <a:t>The worked example — this `*:*` policy is the Misconfig Hunt round 1 and the quiz. If a credential with this leaks, the attacker owns everything. This is 100% manual review — Trivy's config scanner does not parse standalone IAM JSON at all, say so explicitly so students don't wait for a scanner to flag it. The sim scores Action and Resource independently, live, so "two findings, not one" is something they watch instead of a claim on a slide. Least privilege = smallest possible blast radius. ~6 min.</a:t>
             </a:r>
             <a:endParaRPr lang="en-US" dirty="0"/>
           </a:p>
@@ -2572,7 +2661,7 @@
                 <a:ea typeface="Arial" pitchFamily="34" charset="-122"/>
                 <a:cs typeface="Arial" pitchFamily="34" charset="-120"/>
               </a:rPr>
-              <a:t>🔍 Game — Misconfig Hunt</a:t>
+              <a:t>Same app, shipped twice</a:t>
             </a:r>
             <a:endParaRPr lang="en-US" sz="2600" dirty="0"/>
           </a:p>
@@ -2587,7 +2676,7 @@
         <p:spPr>
           <a:xfrm>
             <a:off x="548640" y="1325880"/>
-            <a:ext cx="8046720" cy="548640"/>
+            <a:ext cx="8046720" cy="2468880"/>
           </a:xfrm>
           <a:prstGeom prst="rect">
             <a:avLst/>
@@ -2613,7 +2702,7 @@
                 <a:ea typeface="Calibri" pitchFamily="34" charset="-122"/>
                 <a:cs typeface="Calibri" pitchFamily="34" charset="-120"/>
               </a:rPr>
-              <a:t>9 flags — each misconfiguration found + explained = a flag:</a:t>
+              <a:t>See diagram: The same app as two container images side by side, insecure vs hardened, six layers compared: mutable :latest tag vs a pinned digest, a baked-in secret vs runtime injection, root user vs distroless non-root, COPY-everything vs a minimal context, world-writable permissions vs read-only, and an unpinned pip install vs a discarded build stage. Below both, the same argument one layer up: the wildcard IAM policy vs the scoped one. The conclusion: Trivy flags only three of the seven defects shown here — the tag, the root user, and the secret. COPY .., chmod 777, the unpinned install, and the IAM JSON all need manual review; there is no rule for any of them. (web only)</a:t>
             </a:r>
             <a:endParaRPr lang="en-US" sz="1400" dirty="0"/>
           </a:p>
@@ -2621,34 +2710,14 @@
       </p:sp>
       <p:sp>
         <p:nvSpPr>
-          <p:cNvPr id="6" name="Shape 3"/>
-          <p:cNvSpPr/>
-          <p:nvPr/>
-        </p:nvSpPr>
-        <p:spPr>
-          <a:xfrm>
-            <a:off x="502920" y="1965960"/>
-            <a:ext cx="384048" cy="384048"/>
-          </a:xfrm>
-          <a:prstGeom prst="ellipse">
-            <a:avLst/>
-          </a:prstGeom>
-          <a:solidFill>
-            <a:srgbClr val="E35205"/>
-          </a:solidFill>
-          <a:ln/>
-        </p:spPr>
-      </p:sp>
-      <p:sp>
-        <p:nvSpPr>
-          <p:cNvPr id="7" name="Text 4"/>
-          <p:cNvSpPr/>
-          <p:nvPr/>
-        </p:nvSpPr>
-        <p:spPr>
-          <a:xfrm>
-            <a:off x="502920" y="1965960"/>
-            <a:ext cx="384048" cy="384048"/>
+          <p:cNvPr id="6" name="Text 3"/>
+          <p:cNvSpPr/>
+          <p:nvPr/>
+        </p:nvSpPr>
+        <p:spPr>
+          <a:xfrm>
+            <a:off x="457200" y="4800600"/>
+            <a:ext cx="6949440" cy="274320"/>
           </a:xfrm>
           <a:prstGeom prst="rect">
             <a:avLst/>
@@ -2658,200 +2727,20 @@
         </p:spPr>
         <p:txBody>
           <a:bodyPr wrap="square" lIns="0" tIns="0" rIns="0" bIns="0" rtlCol="0" anchor="ctr"/>
-          <a:lstStyle/>
-          <a:p>
-            <a:pPr algn="ctr" indent="0" marL="0">
-              <a:buNone/>
-            </a:pPr>
-            <a:r>
-              <a:rPr lang="en-US" sz="1500" b="1" dirty="0">
-                <a:solidFill>
-                  <a:srgbClr val="0E1726"/>
-                </a:solidFill>
-                <a:latin typeface="Arial" pitchFamily="34" charset="0"/>
-                <a:ea typeface="Arial" pitchFamily="34" charset="-122"/>
-                <a:cs typeface="Arial" pitchFamily="34" charset="-120"/>
-              </a:rPr>
-              <a:t>1</a:t>
-            </a:r>
-            <a:endParaRPr lang="en-US" sz="1500" dirty="0"/>
-          </a:p>
-        </p:txBody>
-      </p:sp>
-      <p:sp>
-        <p:nvSpPr>
-          <p:cNvPr id="8" name="Text 5"/>
-          <p:cNvSpPr/>
-          <p:nvPr/>
-        </p:nvSpPr>
-        <p:spPr>
-          <a:xfrm>
-            <a:off x="1051560" y="1965960"/>
-            <a:ext cx="7589520" cy="658368"/>
-          </a:xfrm>
-          <a:prstGeom prst="rect">
-            <a:avLst/>
-          </a:prstGeom>
-          <a:noFill/>
-          <a:ln/>
-        </p:spPr>
-        <p:txBody>
-          <a:bodyPr wrap="square" lIns="0" tIns="0" rIns="0" bIns="0" rtlCol="0" anchor="ctr">
-            <a:normAutofit/>
-          </a:bodyPr>
           <a:lstStyle/>
           <a:p>
             <a:pPr indent="0" marL="0">
               <a:buNone/>
             </a:pPr>
             <a:r>
-              <a:rPr lang="en-US" sz="1350" dirty="0">
-                <a:solidFill>
-                  <a:srgbClr val="1F2937"/>
+              <a:rPr lang="en-US" sz="900" dirty="0">
+                <a:solidFill>
+                  <a:srgbClr val="64748B"/>
                 </a:solidFill>
                 <a:latin typeface="Calibri" pitchFamily="34" charset="0"/>
                 <a:ea typeface="Calibri" pitchFamily="34" charset="-122"/>
                 <a:cs typeface="Calibri" pitchFamily="34" charset="-120"/>
               </a:rPr>
-              <a:t>Container (6): :latest tag, root user, secret-in-ENV, COPY . ., chmod -R 777, unpinned pip install</a:t>
-            </a:r>
-            <a:endParaRPr lang="en-US" sz="1350" dirty="0"/>
-          </a:p>
-        </p:txBody>
-      </p:sp>
-      <p:sp>
-        <p:nvSpPr>
-          <p:cNvPr id="9" name="Shape 6"/>
-          <p:cNvSpPr/>
-          <p:nvPr/>
-        </p:nvSpPr>
-        <p:spPr>
-          <a:xfrm>
-            <a:off x="502920" y="2697480"/>
-            <a:ext cx="384048" cy="384048"/>
-          </a:xfrm>
-          <a:prstGeom prst="ellipse">
-            <a:avLst/>
-          </a:prstGeom>
-          <a:solidFill>
-            <a:srgbClr val="E35205"/>
-          </a:solidFill>
-          <a:ln/>
-        </p:spPr>
-      </p:sp>
-      <p:sp>
-        <p:nvSpPr>
-          <p:cNvPr id="10" name="Text 7"/>
-          <p:cNvSpPr/>
-          <p:nvPr/>
-        </p:nvSpPr>
-        <p:spPr>
-          <a:xfrm>
-            <a:off x="502920" y="2697480"/>
-            <a:ext cx="384048" cy="384048"/>
-          </a:xfrm>
-          <a:prstGeom prst="rect">
-            <a:avLst/>
-          </a:prstGeom>
-          <a:noFill/>
-          <a:ln/>
-        </p:spPr>
-        <p:txBody>
-          <a:bodyPr wrap="square" lIns="0" tIns="0" rIns="0" bIns="0" rtlCol="0" anchor="ctr"/>
-          <a:lstStyle/>
-          <a:p>
-            <a:pPr algn="ctr" indent="0" marL="0">
-              <a:buNone/>
-            </a:pPr>
-            <a:r>
-              <a:rPr lang="en-US" sz="1500" b="1" dirty="0">
-                <a:solidFill>
-                  <a:srgbClr val="0E1726"/>
-                </a:solidFill>
-                <a:latin typeface="Arial" pitchFamily="34" charset="0"/>
-                <a:ea typeface="Arial" pitchFamily="34" charset="-122"/>
-                <a:cs typeface="Arial" pitchFamily="34" charset="-120"/>
-              </a:rPr>
-              <a:t>2</a:t>
-            </a:r>
-            <a:endParaRPr lang="en-US" sz="1500" dirty="0"/>
-          </a:p>
-        </p:txBody>
-      </p:sp>
-      <p:sp>
-        <p:nvSpPr>
-          <p:cNvPr id="11" name="Text 8"/>
-          <p:cNvSpPr/>
-          <p:nvPr/>
-        </p:nvSpPr>
-        <p:spPr>
-          <a:xfrm>
-            <a:off x="1051560" y="2697480"/>
-            <a:ext cx="7589520" cy="402336"/>
-          </a:xfrm>
-          <a:prstGeom prst="rect">
-            <a:avLst/>
-          </a:prstGeom>
-          <a:noFill/>
-          <a:ln/>
-        </p:spPr>
-        <p:txBody>
-          <a:bodyPr wrap="square" lIns="0" tIns="0" rIns="0" bIns="0" rtlCol="0" anchor="ctr">
-            <a:normAutofit/>
-          </a:bodyPr>
-          <a:lstStyle/>
-          <a:p>
-            <a:pPr indent="0" marL="0">
-              <a:buNone/>
-            </a:pPr>
-            <a:r>
-              <a:rPr lang="en-US" sz="1350" dirty="0">
-                <a:solidFill>
-                  <a:srgbClr val="1F2937"/>
-                </a:solidFill>
-                <a:latin typeface="Calibri" pitchFamily="34" charset="0"/>
-                <a:ea typeface="Calibri" pitchFamily="34" charset="-122"/>
-                <a:cs typeface="Calibri" pitchFamily="34" charset="-120"/>
-              </a:rPr>
-              <a:t>IAM (3): Resource:"*" (CWE-732), Action:"*" (CWE-269), missing Condition scoping</a:t>
-            </a:r>
-            <a:endParaRPr lang="en-US" sz="1350" dirty="0"/>
-          </a:p>
-        </p:txBody>
-      </p:sp>
-      <p:sp>
-        <p:nvSpPr>
-          <p:cNvPr id="12" name="Text 9"/>
-          <p:cNvSpPr/>
-          <p:nvPr/>
-        </p:nvSpPr>
-        <p:spPr>
-          <a:xfrm>
-            <a:off x="457200" y="4800600"/>
-            <a:ext cx="6949440" cy="274320"/>
-          </a:xfrm>
-          <a:prstGeom prst="rect">
-            <a:avLst/>
-          </a:prstGeom>
-          <a:noFill/>
-          <a:ln/>
-        </p:spPr>
-        <p:txBody>
-          <a:bodyPr wrap="square" lIns="0" tIns="0" rIns="0" bIns="0" rtlCol="0" anchor="ctr"/>
-          <a:lstStyle/>
-          <a:p>
-            <a:pPr indent="0" marL="0">
-              <a:buNone/>
-            </a:pPr>
-            <a:r>
-              <a:rPr lang="en-US" sz="900" dirty="0">
-                <a:solidFill>
-                  <a:srgbClr val="64748B"/>
-                </a:solidFill>
-                <a:latin typeface="Calibri" pitchFamily="34" charset="0"/>
-                <a:ea typeface="Calibri" pitchFamily="34" charset="-122"/>
-                <a:cs typeface="Calibri" pitchFamily="34" charset="-120"/>
-              </a:rPr>
               <a:t>Software Security · Week 13</a:t>
             </a:r>
             <a:endParaRPr lang="en-US" sz="900" dirty="0"/>
@@ -2860,7 +2749,7 @@
       </p:sp>
       <p:pic>
         <p:nvPicPr>
-          <p:cNvPr id="13" name="Image 1" descr="/Users/pop7/Library/CloudStorage/OneDrive-MonsterConnectCo.,Ltd/Lecture/KOSEN69 - software-security/slides/pptx/assets/logo-small.png">    </p:cNvPr>
+          <p:cNvPr id="7" name="Image 1" descr="/Users/pop7/Library/CloudStorage/OneDrive-MonsterConnectCo.,Ltd/Lecture/KOSEN69 - software-security/slides/pptx/assets/logo-small.png">    </p:cNvPr>
           <p:cNvPicPr>
             <a:picLocks noChangeAspect="1"/>
           </p:cNvPicPr>
@@ -2998,7 +2887,7 @@
                 <a:ea typeface="Arial" pitchFamily="34" charset="-122"/>
                 <a:cs typeface="Arial" pitchFamily="34" charset="-120"/>
               </a:rPr>
-              <a:t>Deliverable</a:t>
+              <a:t>🔍 Game — Misconfig Hunt</a:t>
             </a:r>
             <a:endParaRPr lang="en-US" sz="2600" dirty="0"/>
           </a:p>
@@ -3006,36 +2895,114 @@
       </p:sp>
       <p:sp>
         <p:nvSpPr>
-          <p:cNvPr id="5" name="Shape 2"/>
-          <p:cNvSpPr/>
-          <p:nvPr/>
-        </p:nvSpPr>
-        <p:spPr>
-          <a:xfrm>
-            <a:off x="457200" y="1325880"/>
-            <a:ext cx="8229600" cy="1097280"/>
-          </a:xfrm>
-          <a:prstGeom prst="roundRect">
-            <a:avLst>
-              <a:gd name="adj" fmla="val 6667"/>
-            </a:avLst>
+          <p:cNvPr id="5" name="Text 2"/>
+          <p:cNvSpPr/>
+          <p:nvPr/>
+        </p:nvSpPr>
+        <p:spPr>
+          <a:xfrm>
+            <a:off x="548640" y="1325880"/>
+            <a:ext cx="8046720" cy="548640"/>
+          </a:xfrm>
+          <a:prstGeom prst="rect">
+            <a:avLst/>
+          </a:prstGeom>
+          <a:noFill/>
+          <a:ln/>
+        </p:spPr>
+        <p:txBody>
+          <a:bodyPr wrap="square" lIns="0" tIns="0" rIns="0" bIns="0" rtlCol="0" anchor="t">
+            <a:normAutofit/>
+          </a:bodyPr>
+          <a:lstStyle/>
+          <a:p>
+            <a:pPr indent="0" marL="0">
+              <a:buNone/>
+            </a:pPr>
+            <a:r>
+              <a:rPr lang="en-US" sz="1400" dirty="0">
+                <a:solidFill>
+                  <a:srgbClr val="1F2937"/>
+                </a:solidFill>
+                <a:latin typeface="Calibri" pitchFamily="34" charset="0"/>
+                <a:ea typeface="Calibri" pitchFamily="34" charset="-122"/>
+                <a:cs typeface="Calibri" pitchFamily="34" charset="-120"/>
+              </a:rPr>
+              <a:t>9 flags — each misconfiguration found + explained = a flag:</a:t>
+            </a:r>
+            <a:endParaRPr lang="en-US" sz="1400" dirty="0"/>
+          </a:p>
+        </p:txBody>
+      </p:sp>
+      <p:sp>
+        <p:nvSpPr>
+          <p:cNvPr id="6" name="Shape 3"/>
+          <p:cNvSpPr/>
+          <p:nvPr/>
+        </p:nvSpPr>
+        <p:spPr>
+          <a:xfrm>
+            <a:off x="502920" y="1965960"/>
+            <a:ext cx="384048" cy="384048"/>
+          </a:xfrm>
+          <a:prstGeom prst="ellipse">
+            <a:avLst/>
           </a:prstGeom>
           <a:solidFill>
-            <a:srgbClr val="E8EDF3"/>
+            <a:srgbClr val="E35205"/>
           </a:solidFill>
           <a:ln/>
         </p:spPr>
       </p:sp>
       <p:sp>
         <p:nvSpPr>
-          <p:cNvPr id="6" name="Text 3"/>
-          <p:cNvSpPr/>
-          <p:nvPr/>
-        </p:nvSpPr>
-        <p:spPr>
-          <a:xfrm>
-            <a:off x="731520" y="1325880"/>
-            <a:ext cx="7680960" cy="1097280"/>
+          <p:cNvPr id="7" name="Text 4"/>
+          <p:cNvSpPr/>
+          <p:nvPr/>
+        </p:nvSpPr>
+        <p:spPr>
+          <a:xfrm>
+            <a:off x="502920" y="1965960"/>
+            <a:ext cx="384048" cy="384048"/>
+          </a:xfrm>
+          <a:prstGeom prst="rect">
+            <a:avLst/>
+          </a:prstGeom>
+          <a:noFill/>
+          <a:ln/>
+        </p:spPr>
+        <p:txBody>
+          <a:bodyPr wrap="square" lIns="0" tIns="0" rIns="0" bIns="0" rtlCol="0" anchor="ctr"/>
+          <a:lstStyle/>
+          <a:p>
+            <a:pPr algn="ctr" indent="0" marL="0">
+              <a:buNone/>
+            </a:pPr>
+            <a:r>
+              <a:rPr lang="en-US" sz="1500" b="1" dirty="0">
+                <a:solidFill>
+                  <a:srgbClr val="0E1726"/>
+                </a:solidFill>
+                <a:latin typeface="Arial" pitchFamily="34" charset="0"/>
+                <a:ea typeface="Arial" pitchFamily="34" charset="-122"/>
+                <a:cs typeface="Arial" pitchFamily="34" charset="-120"/>
+              </a:rPr>
+              <a:t>1</a:t>
+            </a:r>
+            <a:endParaRPr lang="en-US" sz="1500" dirty="0"/>
+          </a:p>
+        </p:txBody>
+      </p:sp>
+      <p:sp>
+        <p:nvSpPr>
+          <p:cNvPr id="8" name="Text 5"/>
+          <p:cNvSpPr/>
+          <p:nvPr/>
+        </p:nvSpPr>
+        <p:spPr>
+          <a:xfrm>
+            <a:off x="1051560" y="1965960"/>
+            <a:ext cx="7589520" cy="658368"/>
           </a:xfrm>
           <a:prstGeom prst="rect">
             <a:avLst/>
@@ -3053,59 +3020,50 @@
               <a:buNone/>
             </a:pPr>
             <a:r>
-              <a:rPr lang="en-US" sz="1400" i="1" dirty="0">
-                <a:solidFill>
-                  <a:srgbClr val="E35205"/>
+              <a:rPr lang="en-US" sz="1350" dirty="0">
+                <a:solidFill>
+                  <a:srgbClr val="1F2937"/>
                 </a:solidFill>
                 <a:latin typeface="Calibri" pitchFamily="34" charset="0"/>
                 <a:ea typeface="Calibri" pitchFamily="34" charset="-122"/>
                 <a:cs typeface="Calibri" pitchFamily="34" charset="-120"/>
               </a:rPr>
-              <a:t>📋 Worksheet 13 — labs/week13-cloud-container/worksheet.md (Parts 1–4) · kickoff: bash scan.sh (trivy config over the Dockerfiles only — IAM JSON is manual review, Trivy doesn't parse it)</a:t>
-            </a:r>
-            <a:endParaRPr lang="en-US" sz="1400" dirty="0"/>
-          </a:p>
-        </p:txBody>
-      </p:sp>
-      <p:sp>
-        <p:nvSpPr>
-          <p:cNvPr id="7" name="Shape 4"/>
-          <p:cNvSpPr/>
-          <p:nvPr/>
-        </p:nvSpPr>
-        <p:spPr>
-          <a:xfrm>
-            <a:off x="457200" y="2587752"/>
-            <a:ext cx="8229600" cy="1517904"/>
-          </a:xfrm>
-          <a:prstGeom prst="roundRect">
-            <a:avLst>
-              <a:gd name="adj" fmla="val 4819"/>
-            </a:avLst>
+              <a:t>Container (6): :latest tag, root user, secret-in-ENV, COPY . ., chmod -R 777, unpinned pip install</a:t>
+            </a:r>
+            <a:endParaRPr lang="en-US" sz="1350" dirty="0"/>
+          </a:p>
+        </p:txBody>
+      </p:sp>
+      <p:sp>
+        <p:nvSpPr>
+          <p:cNvPr id="9" name="Shape 6"/>
+          <p:cNvSpPr/>
+          <p:nvPr/>
+        </p:nvSpPr>
+        <p:spPr>
+          <a:xfrm>
+            <a:off x="502920" y="2697480"/>
+            <a:ext cx="384048" cy="384048"/>
+          </a:xfrm>
+          <a:prstGeom prst="ellipse">
+            <a:avLst/>
           </a:prstGeom>
           <a:solidFill>
-            <a:srgbClr val="F1F5F9"/>
+            <a:srgbClr val="E35205"/>
           </a:solidFill>
           <a:ln/>
-          <a:effectLst>
-            <a:outerShdw sx="100000" sy="100000" kx="0" ky="0" algn="bl" rotWithShape="0" blurRad="76200" dist="25400" dir="5400000">
-              <a:srgbClr val="000000">
-                <a:alpha val="12000"/>
-              </a:srgbClr>
-            </a:outerShdw>
-          </a:effectLst>
-        </p:spPr>
-      </p:sp>
-      <p:sp>
-        <p:nvSpPr>
-          <p:cNvPr id="8" name="Text 5"/>
-          <p:cNvSpPr/>
-          <p:nvPr/>
-        </p:nvSpPr>
-        <p:spPr>
-          <a:xfrm>
-            <a:off x="731520" y="2697480"/>
-            <a:ext cx="7680960" cy="1298448"/>
+        </p:spPr>
+      </p:sp>
+      <p:sp>
+        <p:nvSpPr>
+          <p:cNvPr id="10" name="Text 7"/>
+          <p:cNvSpPr/>
+          <p:nvPr/>
+        </p:nvSpPr>
+        <p:spPr>
+          <a:xfrm>
+            <a:off x="502920" y="2697480"/>
+            <a:ext cx="384048" cy="384048"/>
           </a:xfrm>
           <a:prstGeom prst="rect">
             <a:avLst/>
@@ -3114,20 +3072,55 @@
           <a:ln/>
         </p:spPr>
         <p:txBody>
-          <a:bodyPr wrap="square" lIns="0" tIns="0" rIns="0" bIns="0" rtlCol="0" anchor="t">
+          <a:bodyPr wrap="square" lIns="0" tIns="0" rIns="0" bIns="0" rtlCol="0" anchor="ctr"/>
+          <a:lstStyle/>
+          <a:p>
+            <a:pPr algn="ctr" indent="0" marL="0">
+              <a:buNone/>
+            </a:pPr>
+            <a:r>
+              <a:rPr lang="en-US" sz="1500" b="1" dirty="0">
+                <a:solidFill>
+                  <a:srgbClr val="0E1726"/>
+                </a:solidFill>
+                <a:latin typeface="Arial" pitchFamily="34" charset="0"/>
+                <a:ea typeface="Arial" pitchFamily="34" charset="-122"/>
+                <a:cs typeface="Arial" pitchFamily="34" charset="-120"/>
+              </a:rPr>
+              <a:t>2</a:t>
+            </a:r>
+            <a:endParaRPr lang="en-US" sz="1500" dirty="0"/>
+          </a:p>
+        </p:txBody>
+      </p:sp>
+      <p:sp>
+        <p:nvSpPr>
+          <p:cNvPr id="11" name="Text 8"/>
+          <p:cNvSpPr/>
+          <p:nvPr/>
+        </p:nvSpPr>
+        <p:spPr>
+          <a:xfrm>
+            <a:off x="1051560" y="2697480"/>
+            <a:ext cx="7589520" cy="402336"/>
+          </a:xfrm>
+          <a:prstGeom prst="rect">
+            <a:avLst/>
+          </a:prstGeom>
+          <a:noFill/>
+          <a:ln/>
+        </p:spPr>
+        <p:txBody>
+          <a:bodyPr wrap="square" lIns="0" tIns="0" rIns="0" bIns="0" rtlCol="0" anchor="ctr">
             <a:normAutofit/>
           </a:bodyPr>
           <a:lstStyle/>
           <a:p>
-            <a:pPr marL="342900" indent="-342900">
-              <a:spcAft>
-                <a:spcPts val="600"/>
-              </a:spcAft>
-              <a:buSzPct val="100000"/>
-              <a:buChar char="•"/>
-            </a:pPr>
-            <a:r>
-              <a:rPr lang="en-US" sz="1400" dirty="0">
+            <a:pPr indent="0" marL="0">
+              <a:buNone/>
+            </a:pPr>
+            <a:r>
+              <a:rPr lang="en-US" sz="1350" dirty="0">
                 <a:solidFill>
                   <a:srgbClr val="1F2937"/>
                 </a:solidFill>
@@ -3135,108 +3128,45 @@
                 <a:ea typeface="Calibri" pitchFamily="34" charset="-122"/>
                 <a:cs typeface="Calibri" pitchFamily="34" charset="-120"/>
               </a:rPr>
-              <a:t>Before/after IAM policy + Dockerfile, all 9 flags explained</a:t>
-            </a:r>
-            <a:endParaRPr lang="en-US" sz="1400" dirty="0"/>
-          </a:p>
-          <a:p>
-            <a:pPr marL="342900" indent="-342900">
-              <a:spcAft>
-                <a:spcPts val="600"/>
-              </a:spcAft>
-              <a:buSzPct val="100000"/>
-              <a:buChar char="•"/>
-            </a:pPr>
-            <a:r>
-              <a:rPr lang="en-US" sz="1400" dirty="0">
-                <a:solidFill>
-                  <a:srgbClr val="1F2937"/>
+              <a:t>IAM (3): Resource:"*" (CWE-732), Action:"*" (CWE-269), missing Condition scoping</a:t>
+            </a:r>
+            <a:endParaRPr lang="en-US" sz="1350" dirty="0"/>
+          </a:p>
+        </p:txBody>
+      </p:sp>
+      <p:sp>
+        <p:nvSpPr>
+          <p:cNvPr id="12" name="Text 9"/>
+          <p:cNvSpPr/>
+          <p:nvPr/>
+        </p:nvSpPr>
+        <p:spPr>
+          <a:xfrm>
+            <a:off x="457200" y="4800600"/>
+            <a:ext cx="6949440" cy="274320"/>
+          </a:xfrm>
+          <a:prstGeom prst="rect">
+            <a:avLst/>
+          </a:prstGeom>
+          <a:noFill/>
+          <a:ln/>
+        </p:spPr>
+        <p:txBody>
+          <a:bodyPr wrap="square" lIns="0" tIns="0" rIns="0" bIns="0" rtlCol="0" anchor="ctr"/>
+          <a:lstStyle/>
+          <a:p>
+            <a:pPr indent="0" marL="0">
+              <a:buNone/>
+            </a:pPr>
+            <a:r>
+              <a:rPr lang="en-US" sz="900" dirty="0">
+                <a:solidFill>
+                  <a:srgbClr val="64748B"/>
                 </a:solidFill>
                 <a:latin typeface="Calibri" pitchFamily="34" charset="0"/>
                 <a:ea typeface="Calibri" pitchFamily="34" charset="-122"/>
                 <a:cs typeface="Calibri" pitchFamily="34" charset="-120"/>
               </a:rPr>
-              <a:t>Trivy reports showing reduced risk (container half only)</a:t>
-            </a:r>
-            <a:endParaRPr lang="en-US" sz="1400" dirty="0"/>
-          </a:p>
-          <a:p>
-            <a:pPr marL="342900" indent="-342900">
-              <a:spcAft>
-                <a:spcPts val="600"/>
-              </a:spcAft>
-              <a:buSzPct val="100000"/>
-              <a:buChar char="•"/>
-            </a:pPr>
-            <a:r>
-              <a:rPr lang="en-US" sz="1400" dirty="0">
-                <a:solidFill>
-                  <a:srgbClr val="1F2937"/>
-                </a:solidFill>
-                <a:latin typeface="Calibri" pitchFamily="34" charset="0"/>
-                <a:ea typeface="Calibri" pitchFamily="34" charset="-122"/>
-                <a:cs typeface="Calibri" pitchFamily="34" charset="-120"/>
-              </a:rPr>
-              <a:t>Note on secrets remediation</a:t>
-            </a:r>
-            <a:endParaRPr lang="en-US" sz="1400" dirty="0"/>
-          </a:p>
-          <a:p>
-            <a:pPr marL="342900" indent="-342900">
-              <a:spcAft>
-                <a:spcPts val="600"/>
-              </a:spcAft>
-              <a:buSzPct val="100000"/>
-              <a:buChar char="•"/>
-            </a:pPr>
-            <a:r>
-              <a:rPr lang="en-US" sz="1400" dirty="0">
-                <a:solidFill>
-                  <a:srgbClr val="1F2937"/>
-                </a:solidFill>
-                <a:latin typeface="Calibri" pitchFamily="34" charset="0"/>
-                <a:ea typeface="Calibri" pitchFamily="34" charset="-122"/>
-                <a:cs typeface="Calibri" pitchFamily="34" charset="-120"/>
-              </a:rPr>
-              <a:t>+ Audit the AI / EiPE / Prompt Problem (see worksheet)</a:t>
-            </a:r>
-            <a:endParaRPr lang="en-US" sz="1400" dirty="0"/>
-          </a:p>
-        </p:txBody>
-      </p:sp>
-      <p:sp>
-        <p:nvSpPr>
-          <p:cNvPr id="9" name="Text 6"/>
-          <p:cNvSpPr/>
-          <p:nvPr/>
-        </p:nvSpPr>
-        <p:spPr>
-          <a:xfrm>
-            <a:off x="457200" y="4800600"/>
-            <a:ext cx="6949440" cy="274320"/>
-          </a:xfrm>
-          <a:prstGeom prst="rect">
-            <a:avLst/>
-          </a:prstGeom>
-          <a:noFill/>
-          <a:ln/>
-        </p:spPr>
-        <p:txBody>
-          <a:bodyPr wrap="square" lIns="0" tIns="0" rIns="0" bIns="0" rtlCol="0" anchor="ctr"/>
-          <a:lstStyle/>
-          <a:p>
-            <a:pPr indent="0" marL="0">
-              <a:buNone/>
-            </a:pPr>
-            <a:r>
-              <a:rPr lang="en-US" sz="900" dirty="0">
-                <a:solidFill>
-                  <a:srgbClr val="64748B"/>
-                </a:solidFill>
-                <a:latin typeface="Calibri" pitchFamily="34" charset="0"/>
-                <a:ea typeface="Calibri" pitchFamily="34" charset="-122"/>
-                <a:cs typeface="Calibri" pitchFamily="34" charset="-120"/>
-              </a:rPr>
               <a:t>Software Security · Week 13</a:t>
             </a:r>
             <a:endParaRPr lang="en-US" sz="900" dirty="0"/>
@@ -3245,7 +3175,7 @@
       </p:sp>
       <p:pic>
         <p:nvPicPr>
-          <p:cNvPr id="10" name="Image 1" descr="/Users/pop7/Library/CloudStorage/OneDrive-MonsterConnectCo.,Ltd/Lecture/KOSEN69 - software-security/slides/pptx/assets/logo-small.png">    </p:cNvPr>
+          <p:cNvPr id="13" name="Image 1" descr="/Users/pop7/Library/CloudStorage/OneDrive-MonsterConnectCo.,Ltd/Lecture/KOSEN69 - software-security/slides/pptx/assets/logo-small.png">    </p:cNvPr>
           <p:cNvPicPr>
             <a:picLocks noChangeAspect="1"/>
           </p:cNvPicPr>
@@ -3383,7 +3313,7 @@
                 <a:ea typeface="Arial" pitchFamily="34" charset="-122"/>
                 <a:cs typeface="Arial" pitchFamily="34" charset="-120"/>
               </a:rPr>
-              <a:t>Key takeaways</a:t>
+              <a:t>Deliverable</a:t>
             </a:r>
             <a:endParaRPr lang="en-US" sz="2600" dirty="0"/>
           </a:p>
@@ -3398,11 +3328,74 @@
         <p:spPr>
           <a:xfrm>
             <a:off x="457200" y="1325880"/>
-            <a:ext cx="8229600" cy="1207008"/>
+            <a:ext cx="8229600" cy="1097280"/>
           </a:xfrm>
           <a:prstGeom prst="roundRect">
             <a:avLst>
-              <a:gd name="adj" fmla="val 6061"/>
+              <a:gd name="adj" fmla="val 6667"/>
+            </a:avLst>
+          </a:prstGeom>
+          <a:solidFill>
+            <a:srgbClr val="E8EDF3"/>
+          </a:solidFill>
+          <a:ln/>
+        </p:spPr>
+      </p:sp>
+      <p:sp>
+        <p:nvSpPr>
+          <p:cNvPr id="6" name="Text 3"/>
+          <p:cNvSpPr/>
+          <p:nvPr/>
+        </p:nvSpPr>
+        <p:spPr>
+          <a:xfrm>
+            <a:off x="731520" y="1325880"/>
+            <a:ext cx="7680960" cy="1097280"/>
+          </a:xfrm>
+          <a:prstGeom prst="rect">
+            <a:avLst/>
+          </a:prstGeom>
+          <a:noFill/>
+          <a:ln/>
+        </p:spPr>
+        <p:txBody>
+          <a:bodyPr wrap="square" lIns="0" tIns="0" rIns="0" bIns="0" rtlCol="0" anchor="ctr">
+            <a:normAutofit/>
+          </a:bodyPr>
+          <a:lstStyle/>
+          <a:p>
+            <a:pPr indent="0" marL="0">
+              <a:buNone/>
+            </a:pPr>
+            <a:r>
+              <a:rPr lang="en-US" sz="1400" i="1" dirty="0">
+                <a:solidFill>
+                  <a:srgbClr val="E35205"/>
+                </a:solidFill>
+                <a:latin typeface="Calibri" pitchFamily="34" charset="0"/>
+                <a:ea typeface="Calibri" pitchFamily="34" charset="-122"/>
+                <a:cs typeface="Calibri" pitchFamily="34" charset="-120"/>
+              </a:rPr>
+              <a:t>📋 Worksheet 13 — labs/week13-cloud-container/worksheet.md (Parts 1–4) · kickoff: bash scan.sh (trivy config over the Dockerfiles only — IAM JSON is manual review, Trivy doesn't parse it)</a:t>
+            </a:r>
+            <a:endParaRPr lang="en-US" sz="1400" dirty="0"/>
+          </a:p>
+        </p:txBody>
+      </p:sp>
+      <p:sp>
+        <p:nvSpPr>
+          <p:cNvPr id="7" name="Shape 4"/>
+          <p:cNvSpPr/>
+          <p:nvPr/>
+        </p:nvSpPr>
+        <p:spPr>
+          <a:xfrm>
+            <a:off x="457200" y="2587752"/>
+            <a:ext cx="8229600" cy="1517904"/>
+          </a:xfrm>
+          <a:prstGeom prst="roundRect">
+            <a:avLst>
+              <a:gd name="adj" fmla="val 4819"/>
             </a:avLst>
           </a:prstGeom>
           <a:solidFill>
@@ -3420,14 +3413,14 @@
       </p:sp>
       <p:sp>
         <p:nvSpPr>
-          <p:cNvPr id="6" name="Text 3"/>
-          <p:cNvSpPr/>
-          <p:nvPr/>
-        </p:nvSpPr>
-        <p:spPr>
-          <a:xfrm>
-            <a:off x="731520" y="1435608"/>
-            <a:ext cx="7680960" cy="987552"/>
+          <p:cNvPr id="8" name="Text 5"/>
+          <p:cNvSpPr/>
+          <p:nvPr/>
+        </p:nvSpPr>
+        <p:spPr>
+          <a:xfrm>
+            <a:off x="731520" y="2697480"/>
+            <a:ext cx="7680960" cy="1298448"/>
           </a:xfrm>
           <a:prstGeom prst="rect">
             <a:avLst/>
@@ -3457,7 +3450,7 @@
                 <a:ea typeface="Calibri" pitchFamily="34" charset="-122"/>
                 <a:cs typeface="Calibri" pitchFamily="34" charset="-120"/>
               </a:rPr>
-              <a:t>Misconfiguration &gt; zero-days as a breach cause</a:t>
+              <a:t>Before/after IAM policy + Dockerfile, all 9 flags explained</a:t>
             </a:r>
             <a:endParaRPr lang="en-US" sz="1400" dirty="0"/>
           </a:p>
@@ -3478,7 +3471,7 @@
                 <a:ea typeface="Calibri" pitchFamily="34" charset="-122"/>
                 <a:cs typeface="Calibri" pitchFamily="34" charset="-120"/>
               </a:rPr>
-              <a:t>Least privilege, private-by-default, no secrets in code</a:t>
+              <a:t>Trivy reports showing reduced risk (container half only)</a:t>
             </a:r>
             <a:endParaRPr lang="en-US" sz="1400" dirty="0"/>
           </a:p>
@@ -3499,45 +3492,66 @@
                 <a:ea typeface="Calibri" pitchFamily="34" charset="-122"/>
                 <a:cs typeface="Calibri" pitchFamily="34" charset="-120"/>
               </a:rPr>
-              <a:t>Scan IaC and images in CI</a:t>
+              <a:t>Note on secrets remediation</a:t>
             </a:r>
             <a:endParaRPr lang="en-US" sz="1400" dirty="0"/>
           </a:p>
-        </p:txBody>
-      </p:sp>
-      <p:sp>
-        <p:nvSpPr>
-          <p:cNvPr id="7" name="Text 4"/>
-          <p:cNvSpPr/>
-          <p:nvPr/>
-        </p:nvSpPr>
-        <p:spPr>
-          <a:xfrm>
-            <a:off x="457200" y="4800600"/>
-            <a:ext cx="6949440" cy="274320"/>
-          </a:xfrm>
-          <a:prstGeom prst="rect">
-            <a:avLst/>
-          </a:prstGeom>
-          <a:noFill/>
-          <a:ln/>
-        </p:spPr>
-        <p:txBody>
-          <a:bodyPr wrap="square" lIns="0" tIns="0" rIns="0" bIns="0" rtlCol="0" anchor="ctr"/>
-          <a:lstStyle/>
-          <a:p>
-            <a:pPr indent="0" marL="0">
-              <a:buNone/>
-            </a:pPr>
-            <a:r>
-              <a:rPr lang="en-US" sz="900" dirty="0">
-                <a:solidFill>
-                  <a:srgbClr val="64748B"/>
+          <a:p>
+            <a:pPr marL="342900" indent="-342900">
+              <a:spcAft>
+                <a:spcPts val="600"/>
+              </a:spcAft>
+              <a:buSzPct val="100000"/>
+              <a:buChar char="•"/>
+            </a:pPr>
+            <a:r>
+              <a:rPr lang="en-US" sz="1400" dirty="0">
+                <a:solidFill>
+                  <a:srgbClr val="1F2937"/>
                 </a:solidFill>
                 <a:latin typeface="Calibri" pitchFamily="34" charset="0"/>
                 <a:ea typeface="Calibri" pitchFamily="34" charset="-122"/>
                 <a:cs typeface="Calibri" pitchFamily="34" charset="-120"/>
               </a:rPr>
+              <a:t>+ Audit the AI / EiPE / Prompt Problem (see worksheet)</a:t>
+            </a:r>
+            <a:endParaRPr lang="en-US" sz="1400" dirty="0"/>
+          </a:p>
+        </p:txBody>
+      </p:sp>
+      <p:sp>
+        <p:nvSpPr>
+          <p:cNvPr id="9" name="Text 6"/>
+          <p:cNvSpPr/>
+          <p:nvPr/>
+        </p:nvSpPr>
+        <p:spPr>
+          <a:xfrm>
+            <a:off x="457200" y="4800600"/>
+            <a:ext cx="6949440" cy="274320"/>
+          </a:xfrm>
+          <a:prstGeom prst="rect">
+            <a:avLst/>
+          </a:prstGeom>
+          <a:noFill/>
+          <a:ln/>
+        </p:spPr>
+        <p:txBody>
+          <a:bodyPr wrap="square" lIns="0" tIns="0" rIns="0" bIns="0" rtlCol="0" anchor="ctr"/>
+          <a:lstStyle/>
+          <a:p>
+            <a:pPr indent="0" marL="0">
+              <a:buNone/>
+            </a:pPr>
+            <a:r>
+              <a:rPr lang="en-US" sz="900" dirty="0">
+                <a:solidFill>
+                  <a:srgbClr val="64748B"/>
+                </a:solidFill>
+                <a:latin typeface="Calibri" pitchFamily="34" charset="0"/>
+                <a:ea typeface="Calibri" pitchFamily="34" charset="-122"/>
+                <a:cs typeface="Calibri" pitchFamily="34" charset="-120"/>
+              </a:rPr>
               <a:t>Software Security · Week 13</a:t>
             </a:r>
             <a:endParaRPr lang="en-US" sz="900" dirty="0"/>
@@ -3546,7 +3560,7 @@
       </p:sp>
       <p:pic>
         <p:nvPicPr>
-          <p:cNvPr id="8" name="Image 1" descr="/Users/pop7/Library/CloudStorage/OneDrive-MonsterConnectCo.,Ltd/Lecture/KOSEN69 - software-security/slides/pptx/assets/logo-small.png">    </p:cNvPr>
+          <p:cNvPr id="10" name="Image 1" descr="/Users/pop7/Library/CloudStorage/OneDrive-MonsterConnectCo.,Ltd/Lecture/KOSEN69 - software-security/slides/pptx/assets/logo-small.png">    </p:cNvPr>
           <p:cNvPicPr>
             <a:picLocks noChangeAspect="1"/>
           </p:cNvPicPr>
@@ -3602,6 +3616,307 @@
       </p:grpSpPr>
       <p:sp>
         <p:nvSpPr>
+          <p:cNvPr id="2" name="Shape 0"/>
+          <p:cNvSpPr/>
+          <p:nvPr/>
+        </p:nvSpPr>
+        <p:spPr>
+          <a:xfrm>
+            <a:off x="457200" y="384048"/>
+            <a:ext cx="530352" cy="530352"/>
+          </a:xfrm>
+          <a:prstGeom prst="ellipse">
+            <a:avLst/>
+          </a:prstGeom>
+          <a:solidFill>
+            <a:srgbClr val="E35205"/>
+          </a:solidFill>
+          <a:ln/>
+          <a:effectLst>
+            <a:outerShdw sx="100000" sy="100000" kx="0" ky="0" algn="bl" rotWithShape="0" blurRad="76200" dist="25400" dir="5400000">
+              <a:srgbClr val="000000">
+                <a:alpha val="12000"/>
+              </a:srgbClr>
+            </a:outerShdw>
+          </a:effectLst>
+        </p:spPr>
+      </p:sp>
+      <p:pic>
+        <p:nvPicPr>
+          <p:cNvPr id="3" name="Image 0" descr="preencoded.png">    </p:cNvPr>
+          <p:cNvPicPr>
+            <a:picLocks noChangeAspect="1"/>
+          </p:cNvPicPr>
+          <p:nvPr/>
+        </p:nvPicPr>
+        <p:blipFill>
+          <a:blip r:embed="rId1"/>
+          <a:stretch>
+            <a:fillRect/>
+          </a:stretch>
+        </p:blipFill>
+        <p:spPr>
+          <a:xfrm>
+            <a:off x="594360" y="521208"/>
+            <a:ext cx="256032" cy="256032"/>
+          </a:xfrm>
+          <a:prstGeom prst="rect">
+            <a:avLst/>
+          </a:prstGeom>
+        </p:spPr>
+      </p:pic>
+      <p:sp>
+        <p:nvSpPr>
+          <p:cNvPr id="4" name="Text 1"/>
+          <p:cNvSpPr/>
+          <p:nvPr/>
+        </p:nvSpPr>
+        <p:spPr>
+          <a:xfrm>
+            <a:off x="1143000" y="329184"/>
+            <a:ext cx="7498080" cy="603504"/>
+          </a:xfrm>
+          <a:prstGeom prst="rect">
+            <a:avLst/>
+          </a:prstGeom>
+          <a:noFill/>
+          <a:ln/>
+        </p:spPr>
+        <p:txBody>
+          <a:bodyPr wrap="square" lIns="0" tIns="0" rIns="0" bIns="0" rtlCol="0" anchor="ctr"/>
+          <a:lstStyle/>
+          <a:p>
+            <a:pPr indent="0" marL="0">
+              <a:buNone/>
+            </a:pPr>
+            <a:r>
+              <a:rPr lang="en-US" sz="2600" b="1" dirty="0">
+                <a:solidFill>
+                  <a:srgbClr val="1F2937"/>
+                </a:solidFill>
+                <a:latin typeface="Arial" pitchFamily="34" charset="0"/>
+                <a:ea typeface="Arial" pitchFamily="34" charset="-122"/>
+                <a:cs typeface="Arial" pitchFamily="34" charset="-120"/>
+              </a:rPr>
+              <a:t>Key takeaways</a:t>
+            </a:r>
+            <a:endParaRPr lang="en-US" sz="2600" dirty="0"/>
+          </a:p>
+        </p:txBody>
+      </p:sp>
+      <p:sp>
+        <p:nvSpPr>
+          <p:cNvPr id="5" name="Shape 2"/>
+          <p:cNvSpPr/>
+          <p:nvPr/>
+        </p:nvSpPr>
+        <p:spPr>
+          <a:xfrm>
+            <a:off x="457200" y="1325880"/>
+            <a:ext cx="8229600" cy="1207008"/>
+          </a:xfrm>
+          <a:prstGeom prst="roundRect">
+            <a:avLst>
+              <a:gd name="adj" fmla="val 6061"/>
+            </a:avLst>
+          </a:prstGeom>
+          <a:solidFill>
+            <a:srgbClr val="F1F5F9"/>
+          </a:solidFill>
+          <a:ln/>
+          <a:effectLst>
+            <a:outerShdw sx="100000" sy="100000" kx="0" ky="0" algn="bl" rotWithShape="0" blurRad="76200" dist="25400" dir="5400000">
+              <a:srgbClr val="000000">
+                <a:alpha val="12000"/>
+              </a:srgbClr>
+            </a:outerShdw>
+          </a:effectLst>
+        </p:spPr>
+      </p:sp>
+      <p:sp>
+        <p:nvSpPr>
+          <p:cNvPr id="6" name="Text 3"/>
+          <p:cNvSpPr/>
+          <p:nvPr/>
+        </p:nvSpPr>
+        <p:spPr>
+          <a:xfrm>
+            <a:off x="731520" y="1435608"/>
+            <a:ext cx="7680960" cy="987552"/>
+          </a:xfrm>
+          <a:prstGeom prst="rect">
+            <a:avLst/>
+          </a:prstGeom>
+          <a:noFill/>
+          <a:ln/>
+        </p:spPr>
+        <p:txBody>
+          <a:bodyPr wrap="square" lIns="0" tIns="0" rIns="0" bIns="0" rtlCol="0" anchor="t">
+            <a:normAutofit/>
+          </a:bodyPr>
+          <a:lstStyle/>
+          <a:p>
+            <a:pPr marL="342900" indent="-342900">
+              <a:spcAft>
+                <a:spcPts val="600"/>
+              </a:spcAft>
+              <a:buSzPct val="100000"/>
+              <a:buChar char="•"/>
+            </a:pPr>
+            <a:r>
+              <a:rPr lang="en-US" sz="1400" dirty="0">
+                <a:solidFill>
+                  <a:srgbClr val="1F2937"/>
+                </a:solidFill>
+                <a:latin typeface="Calibri" pitchFamily="34" charset="0"/>
+                <a:ea typeface="Calibri" pitchFamily="34" charset="-122"/>
+                <a:cs typeface="Calibri" pitchFamily="34" charset="-120"/>
+              </a:rPr>
+              <a:t>Misconfiguration &gt; zero-days as a breach cause</a:t>
+            </a:r>
+            <a:endParaRPr lang="en-US" sz="1400" dirty="0"/>
+          </a:p>
+          <a:p>
+            <a:pPr marL="342900" indent="-342900">
+              <a:spcAft>
+                <a:spcPts val="600"/>
+              </a:spcAft>
+              <a:buSzPct val="100000"/>
+              <a:buChar char="•"/>
+            </a:pPr>
+            <a:r>
+              <a:rPr lang="en-US" sz="1400" dirty="0">
+                <a:solidFill>
+                  <a:srgbClr val="1F2937"/>
+                </a:solidFill>
+                <a:latin typeface="Calibri" pitchFamily="34" charset="0"/>
+                <a:ea typeface="Calibri" pitchFamily="34" charset="-122"/>
+                <a:cs typeface="Calibri" pitchFamily="34" charset="-120"/>
+              </a:rPr>
+              <a:t>Least privilege, private-by-default, no secrets in code</a:t>
+            </a:r>
+            <a:endParaRPr lang="en-US" sz="1400" dirty="0"/>
+          </a:p>
+          <a:p>
+            <a:pPr marL="342900" indent="-342900">
+              <a:spcAft>
+                <a:spcPts val="600"/>
+              </a:spcAft>
+              <a:buSzPct val="100000"/>
+              <a:buChar char="•"/>
+            </a:pPr>
+            <a:r>
+              <a:rPr lang="en-US" sz="1400" dirty="0">
+                <a:solidFill>
+                  <a:srgbClr val="1F2937"/>
+                </a:solidFill>
+                <a:latin typeface="Calibri" pitchFamily="34" charset="0"/>
+                <a:ea typeface="Calibri" pitchFamily="34" charset="-122"/>
+                <a:cs typeface="Calibri" pitchFamily="34" charset="-120"/>
+              </a:rPr>
+              <a:t>Scan IaC and images in CI</a:t>
+            </a:r>
+            <a:endParaRPr lang="en-US" sz="1400" dirty="0"/>
+          </a:p>
+        </p:txBody>
+      </p:sp>
+      <p:sp>
+        <p:nvSpPr>
+          <p:cNvPr id="7" name="Text 4"/>
+          <p:cNvSpPr/>
+          <p:nvPr/>
+        </p:nvSpPr>
+        <p:spPr>
+          <a:xfrm>
+            <a:off x="457200" y="4800600"/>
+            <a:ext cx="6949440" cy="274320"/>
+          </a:xfrm>
+          <a:prstGeom prst="rect">
+            <a:avLst/>
+          </a:prstGeom>
+          <a:noFill/>
+          <a:ln/>
+        </p:spPr>
+        <p:txBody>
+          <a:bodyPr wrap="square" lIns="0" tIns="0" rIns="0" bIns="0" rtlCol="0" anchor="ctr"/>
+          <a:lstStyle/>
+          <a:p>
+            <a:pPr indent="0" marL="0">
+              <a:buNone/>
+            </a:pPr>
+            <a:r>
+              <a:rPr lang="en-US" sz="900" dirty="0">
+                <a:solidFill>
+                  <a:srgbClr val="64748B"/>
+                </a:solidFill>
+                <a:latin typeface="Calibri" pitchFamily="34" charset="0"/>
+                <a:ea typeface="Calibri" pitchFamily="34" charset="-122"/>
+                <a:cs typeface="Calibri" pitchFamily="34" charset="-120"/>
+              </a:rPr>
+              <a:t>Software Security · Week 13</a:t>
+            </a:r>
+            <a:endParaRPr lang="en-US" sz="900" dirty="0"/>
+          </a:p>
+        </p:txBody>
+      </p:sp>
+      <p:pic>
+        <p:nvPicPr>
+          <p:cNvPr id="8" name="Image 1" descr="/Users/pop7/Library/CloudStorage/OneDrive-MonsterConnectCo.,Ltd/Lecture/KOSEN69 - software-security/slides/pptx/assets/logo-small.png">    </p:cNvPr>
+          <p:cNvPicPr>
+            <a:picLocks noChangeAspect="1"/>
+          </p:cNvPicPr>
+          <p:nvPr/>
+        </p:nvPicPr>
+        <p:blipFill>
+          <a:blip r:embed="rId2"/>
+          <a:stretch>
+            <a:fillRect/>
+          </a:stretch>
+        </p:blipFill>
+        <p:spPr>
+          <a:xfrm>
+            <a:off x="7882128" y="4700016"/>
+            <a:ext cx="768096" cy="356616"/>
+          </a:xfrm>
+          <a:prstGeom prst="rect">
+            <a:avLst/>
+          </a:prstGeom>
+        </p:spPr>
+      </p:pic>
+    </p:spTree>
+  </p:cSld>
+  <p:clrMapOvr>
+    <a:masterClrMapping/>
+  </p:clrMapOvr>
+</p:sld>
+</file>
+
+<file path=ppt/slides/slide15.xml><?xml version="1.0" encoding="utf-8"?>
+<p:sld xmlns:a="http://schemas.openxmlformats.org/drawingml/2006/main" xmlns:r="http://schemas.openxmlformats.org/officeDocument/2006/relationships" xmlns:p="http://schemas.openxmlformats.org/presentationml/2006/main">
+  <p:cSld name="Slide 15">
+    <p:bg>
+      <p:bgPr>
+        <a:solidFill>
+          <a:srgbClr val="FFFFFF"/>
+        </a:solidFill>
+      </p:bgPr>
+    </p:bg>
+    <p:spTree>
+      <p:nvGrpSpPr>
+        <p:cNvPr id="1" name=""/>
+        <p:cNvGrpSpPr/>
+        <p:nvPr/>
+      </p:nvGrpSpPr>
+      <p:grpSpPr>
+        <a:xfrm>
+          <a:off x="0" y="0"/>
+          <a:ext cx="0" cy="0"/>
+          <a:chOff x="0" y="0"/>
+          <a:chExt cx="0" cy="0"/>
+        </a:xfrm>
+      </p:grpSpPr>
+      <p:sp>
+        <p:nvSpPr>
           <p:cNvPr id="2" name="Text 0"/>
           <p:cNvSpPr/>
           <p:nvPr/>
@@ -4961,8 +5276,8 @@
         </p:nvSpPr>
         <p:spPr>
           <a:xfrm>
-            <a:off x="457200" y="4800600"/>
-            <a:ext cx="6949440" cy="274320"/>
+            <a:off x="548640" y="3959352"/>
+            <a:ext cx="8046720" cy="548640"/>
           </a:xfrm>
           <a:prstGeom prst="rect">
             <a:avLst/>
@@ -4971,21 +5286,62 @@
           <a:ln/>
         </p:spPr>
         <p:txBody>
-          <a:bodyPr wrap="square" lIns="0" tIns="0" rIns="0" bIns="0" rtlCol="0" anchor="ctr"/>
+          <a:bodyPr wrap="square" lIns="0" tIns="0" rIns="0" bIns="0" rtlCol="0" anchor="t">
+            <a:normAutofit/>
+          </a:bodyPr>
           <a:lstStyle/>
           <a:p>
             <a:pPr indent="0" marL="0">
               <a:buNone/>
             </a:pPr>
             <a:r>
-              <a:rPr lang="en-US" sz="900" dirty="0">
-                <a:solidFill>
-                  <a:srgbClr val="64748B"/>
+              <a:rPr lang="en-US" sz="1400" dirty="0">
+                <a:solidFill>
+                  <a:srgbClr val="1F2937"/>
                 </a:solidFill>
                 <a:latin typeface="Calibri" pitchFamily="34" charset="0"/>
                 <a:ea typeface="Calibri" pitchFamily="34" charset="-122"/>
                 <a:cs typeface="Calibri" pitchFamily="34" charset="-120"/>
               </a:rPr>
+              <a:t>Try it live: /sim/iam-scope (interactive simulation, web only)</a:t>
+            </a:r>
+            <a:endParaRPr lang="en-US" sz="1400" dirty="0"/>
+          </a:p>
+        </p:txBody>
+      </p:sp>
+      <p:sp>
+        <p:nvSpPr>
+          <p:cNvPr id="10" name="Text 7"/>
+          <p:cNvSpPr/>
+          <p:nvPr/>
+        </p:nvSpPr>
+        <p:spPr>
+          <a:xfrm>
+            <a:off x="457200" y="4800600"/>
+            <a:ext cx="6949440" cy="274320"/>
+          </a:xfrm>
+          <a:prstGeom prst="rect">
+            <a:avLst/>
+          </a:prstGeom>
+          <a:noFill/>
+          <a:ln/>
+        </p:spPr>
+        <p:txBody>
+          <a:bodyPr wrap="square" lIns="0" tIns="0" rIns="0" bIns="0" rtlCol="0" anchor="ctr"/>
+          <a:lstStyle/>
+          <a:p>
+            <a:pPr indent="0" marL="0">
+              <a:buNone/>
+            </a:pPr>
+            <a:r>
+              <a:rPr lang="en-US" sz="900" dirty="0">
+                <a:solidFill>
+                  <a:srgbClr val="64748B"/>
+                </a:solidFill>
+                <a:latin typeface="Calibri" pitchFamily="34" charset="0"/>
+                <a:ea typeface="Calibri" pitchFamily="34" charset="-122"/>
+                <a:cs typeface="Calibri" pitchFamily="34" charset="-120"/>
+              </a:rPr>
               <a:t>Software Security · Week 13</a:t>
             </a:r>
             <a:endParaRPr lang="en-US" sz="900" dirty="0"/>
@@ -4994,7 +5350,7 @@
       </p:sp>
       <p:pic>
         <p:nvPicPr>
-          <p:cNvPr id="10" name="Image 1" descr="/Users/pop7/Library/CloudStorage/OneDrive-MonsterConnectCo.,Ltd/Lecture/KOSEN69 - software-security/slides/pptx/assets/logo-small.png">    </p:cNvPr>
+          <p:cNvPr id="11" name="Image 1" descr="/Users/pop7/Library/CloudStorage/OneDrive-MonsterConnectCo.,Ltd/Lecture/KOSEN69 - software-security/slides/pptx/assets/logo-small.png">    </p:cNvPr>
           <p:cNvPicPr>
             <a:picLocks noChangeAspect="1"/>
           </p:cNvPicPr>
